--- a/materials/lectures/14-bellman_ford/slides.pptx
+++ b/materials/lectures/14-bellman_ford/slides.pptx
@@ -7,7 +7,7 @@
     <p:sldMasterId id="2147483668" r:id="rId3"/>
   </p:sldMasterIdLst>
   <p:notesMasterIdLst>
-    <p:notesMasterId r:id="rId55"/>
+    <p:notesMasterId r:id="rId57"/>
   </p:notesMasterIdLst>
   <p:sldIdLst>
     <p:sldId id="256" r:id="rId4"/>
@@ -38,95 +38,85 @@
     <p:sldId id="831" r:id="rId29"/>
     <p:sldId id="832" r:id="rId30"/>
     <p:sldId id="836" r:id="rId31"/>
-    <p:sldId id="837" r:id="rId32"/>
-    <p:sldId id="839" r:id="rId33"/>
-    <p:sldId id="840" r:id="rId34"/>
-    <p:sldId id="845" r:id="rId35"/>
-    <p:sldId id="846" r:id="rId36"/>
-    <p:sldId id="838" r:id="rId37"/>
-    <p:sldId id="851" r:id="rId38"/>
-    <p:sldId id="852" r:id="rId39"/>
-    <p:sldId id="853" r:id="rId40"/>
-    <p:sldId id="854" r:id="rId41"/>
-    <p:sldId id="856" r:id="rId42"/>
-    <p:sldId id="857" r:id="rId43"/>
-    <p:sldId id="858" r:id="rId44"/>
-    <p:sldId id="859" r:id="rId45"/>
-    <p:sldId id="860" r:id="rId46"/>
-    <p:sldId id="867" r:id="rId47"/>
-    <p:sldId id="847" r:id="rId48"/>
-    <p:sldId id="861" r:id="rId49"/>
-    <p:sldId id="863" r:id="rId50"/>
-    <p:sldId id="865" r:id="rId51"/>
-    <p:sldId id="864" r:id="rId52"/>
-    <p:sldId id="866" r:id="rId53"/>
-    <p:sldId id="811" r:id="rId54"/>
+    <p:sldId id="869" r:id="rId32"/>
+    <p:sldId id="837" r:id="rId33"/>
+    <p:sldId id="870" r:id="rId34"/>
+    <p:sldId id="839" r:id="rId35"/>
+    <p:sldId id="840" r:id="rId36"/>
+    <p:sldId id="845" r:id="rId37"/>
+    <p:sldId id="846" r:id="rId38"/>
+    <p:sldId id="838" r:id="rId39"/>
+    <p:sldId id="851" r:id="rId40"/>
+    <p:sldId id="852" r:id="rId41"/>
+    <p:sldId id="853" r:id="rId42"/>
+    <p:sldId id="854" r:id="rId43"/>
+    <p:sldId id="856" r:id="rId44"/>
+    <p:sldId id="857" r:id="rId45"/>
+    <p:sldId id="858" r:id="rId46"/>
+    <p:sldId id="859" r:id="rId47"/>
+    <p:sldId id="860" r:id="rId48"/>
+    <p:sldId id="867" r:id="rId49"/>
+    <p:sldId id="847" r:id="rId50"/>
+    <p:sldId id="861" r:id="rId51"/>
+    <p:sldId id="863" r:id="rId52"/>
+    <p:sldId id="865" r:id="rId53"/>
+    <p:sldId id="864" r:id="rId54"/>
+    <p:sldId id="866" r:id="rId55"/>
+    <p:sldId id="811" r:id="rId56"/>
   </p:sldIdLst>
   <p:sldSz cx="12192000" cy="6858000"/>
   <p:notesSz cx="6858000" cy="9144000"/>
   <p:embeddedFontLst>
     <p:embeddedFont>
       <p:font typeface="Abadi" panose="020B0604020104020204" pitchFamily="34" charset="0"/>
-      <p:regular r:id="rId56"/>
+      <p:regular r:id="rId58"/>
     </p:embeddedFont>
     <p:embeddedFont>
       <p:font typeface="Arial Nova Cond" panose="020B0506020202020204" pitchFamily="34" charset="0"/>
-      <p:regular r:id="rId57"/>
-      <p:bold r:id="rId58"/>
-      <p:italic r:id="rId59"/>
-      <p:boldItalic r:id="rId60"/>
+      <p:regular r:id="rId59"/>
+      <p:bold r:id="rId60"/>
+      <p:italic r:id="rId61"/>
+      <p:boldItalic r:id="rId62"/>
     </p:embeddedFont>
     <p:embeddedFont>
       <p:font typeface="Bookman Old Style" panose="02050604050505020204" pitchFamily="18" charset="0"/>
-      <p:regular r:id="rId61"/>
-      <p:bold r:id="rId62"/>
-      <p:italic r:id="rId63"/>
-      <p:boldItalic r:id="rId64"/>
-    </p:embeddedFont>
-    <p:embeddedFont>
-      <p:font typeface="Calibri" panose="020F0502020204030204" pitchFamily="34" charset="0"/>
-      <p:regular r:id="rId65"/>
-      <p:bold r:id="rId66"/>
-      <p:italic r:id="rId67"/>
-      <p:boldItalic r:id="rId68"/>
-    </p:embeddedFont>
-    <p:embeddedFont>
-      <p:font typeface="Calibri Light" panose="020F0302020204030204" pitchFamily="34" charset="0"/>
-      <p:regular r:id="rId69"/>
-      <p:italic r:id="rId70"/>
+      <p:regular r:id="rId63"/>
+      <p:bold r:id="rId64"/>
+      <p:italic r:id="rId65"/>
+      <p:boldItalic r:id="rId66"/>
     </p:embeddedFont>
     <p:embeddedFont>
       <p:font typeface="Cambria Math" panose="02040503050406030204" pitchFamily="18" charset="0"/>
-      <p:regular r:id="rId71"/>
+      <p:regular r:id="rId67"/>
     </p:embeddedFont>
     <p:embeddedFont>
       <p:font typeface="Gill Sans MT" panose="020B0502020104020203" pitchFamily="34" charset="0"/>
+      <p:regular r:id="rId68"/>
+      <p:bold r:id="rId69"/>
+      <p:italic r:id="rId70"/>
+      <p:boldItalic r:id="rId71"/>
+    </p:embeddedFont>
+    <p:embeddedFont>
+      <p:font typeface="Segoe UI" panose="020B0502040204020203" pitchFamily="34" charset="0"/>
       <p:regular r:id="rId72"/>
       <p:bold r:id="rId73"/>
       <p:italic r:id="rId74"/>
       <p:boldItalic r:id="rId75"/>
     </p:embeddedFont>
     <p:embeddedFont>
-      <p:font typeface="Segoe UI" panose="020B0502040204020203" pitchFamily="34" charset="0"/>
+      <p:font typeface="Times" panose="02020603050405020304" pitchFamily="18" charset="0"/>
       <p:regular r:id="rId76"/>
       <p:bold r:id="rId77"/>
       <p:italic r:id="rId78"/>
       <p:boldItalic r:id="rId79"/>
     </p:embeddedFont>
     <p:embeddedFont>
-      <p:font typeface="Times" panose="02020603050405020304" pitchFamily="18" charset="0"/>
+      <p:font typeface="Wingdings 3" panose="05040102010807070707" pitchFamily="18" charset="2"/>
       <p:regular r:id="rId80"/>
-      <p:bold r:id="rId81"/>
-      <p:italic r:id="rId82"/>
-      <p:boldItalic r:id="rId83"/>
-    </p:embeddedFont>
-    <p:embeddedFont>
-      <p:font typeface="Wingdings 3" panose="05040102010807070707" pitchFamily="18" charset="2"/>
-      <p:regular r:id="rId84"/>
     </p:embeddedFont>
   </p:embeddedFontLst>
   <p:custDataLst>
-    <p:tags r:id="rId85"/>
+    <p:tags r:id="rId81"/>
   </p:custDataLst>
   <p:defaultTextStyle>
     <a:defPPr>
@@ -1259,7 +1249,7 @@
               <a:pPr>
                 <a:defRPr/>
               </a:pPr>
-              <a:t>5/21/2023</a:t>
+              <a:t>2/22/2025</a:t>
             </a:fld>
             <a:endParaRPr lang="en-US"/>
           </a:p>
@@ -1947,7 +1937,7 @@
               <a:pPr>
                 <a:defRPr/>
               </a:pPr>
-              <a:t>5/21/2023</a:t>
+              <a:t>2/22/2025</a:t>
             </a:fld>
             <a:endParaRPr lang="en-US"/>
           </a:p>
@@ -2191,7 +2181,7 @@
           <a:p>
             <a:fld id="{344494C4-6097-4BA9-B81C-8FE8D10E85BA}" type="datetimeFigureOut">
               <a:rPr lang="en-US" smtClean="0"/>
-              <a:t>5/21/2023</a:t>
+              <a:t>2/22/2025</a:t>
             </a:fld>
             <a:endParaRPr lang="en-US"/>
           </a:p>
@@ -2436,7 +2426,7 @@
           <a:p>
             <a:fld id="{344494C4-6097-4BA9-B81C-8FE8D10E85BA}" type="datetimeFigureOut">
               <a:rPr lang="en-US" smtClean="0"/>
-              <a:t>5/21/2023</a:t>
+              <a:t>2/22/2025</a:t>
             </a:fld>
             <a:endParaRPr lang="en-US"/>
           </a:p>
@@ -2816,7 +2806,7 @@
           <a:p>
             <a:fld id="{344494C4-6097-4BA9-B81C-8FE8D10E85BA}" type="datetimeFigureOut">
               <a:rPr lang="en-US" smtClean="0"/>
-              <a:t>5/21/2023</a:t>
+              <a:t>2/22/2025</a:t>
             </a:fld>
             <a:endParaRPr lang="en-US"/>
           </a:p>
@@ -2949,7 +2939,7 @@
           <a:p>
             <a:fld id="{344494C4-6097-4BA9-B81C-8FE8D10E85BA}" type="datetimeFigureOut">
               <a:rPr lang="en-US" smtClean="0"/>
-              <a:t>5/21/2023</a:t>
+              <a:t>2/22/2025</a:t>
             </a:fld>
             <a:endParaRPr lang="en-US"/>
           </a:p>
@@ -3060,7 +3050,7 @@
           <a:p>
             <a:fld id="{344494C4-6097-4BA9-B81C-8FE8D10E85BA}" type="datetimeFigureOut">
               <a:rPr lang="en-US" smtClean="0"/>
-              <a:t>5/21/2023</a:t>
+              <a:t>2/22/2025</a:t>
             </a:fld>
             <a:endParaRPr lang="en-US"/>
           </a:p>
@@ -3351,7 +3341,7 @@
           <a:p>
             <a:fld id="{344494C4-6097-4BA9-B81C-8FE8D10E85BA}" type="datetimeFigureOut">
               <a:rPr lang="en-US" smtClean="0"/>
-              <a:t>5/21/2023</a:t>
+              <a:t>2/22/2025</a:t>
             </a:fld>
             <a:endParaRPr lang="en-US"/>
           </a:p>
@@ -3619,7 +3609,7 @@
           <a:p>
             <a:fld id="{344494C4-6097-4BA9-B81C-8FE8D10E85BA}" type="datetimeFigureOut">
               <a:rPr lang="en-US" smtClean="0"/>
-              <a:t>5/21/2023</a:t>
+              <a:t>2/22/2025</a:t>
             </a:fld>
             <a:endParaRPr lang="en-US"/>
           </a:p>
@@ -3803,7 +3793,7 @@
           <a:p>
             <a:fld id="{344494C4-6097-4BA9-B81C-8FE8D10E85BA}" type="datetimeFigureOut">
               <a:rPr lang="en-US" smtClean="0"/>
-              <a:t>5/21/2023</a:t>
+              <a:t>2/22/2025</a:t>
             </a:fld>
             <a:endParaRPr lang="en-US"/>
           </a:p>
@@ -3997,7 +3987,7 @@
           <a:p>
             <a:fld id="{344494C4-6097-4BA9-B81C-8FE8D10E85BA}" type="datetimeFigureOut">
               <a:rPr lang="en-US" smtClean="0"/>
-              <a:t>5/21/2023</a:t>
+              <a:t>2/22/2025</a:t>
             </a:fld>
             <a:endParaRPr lang="en-US"/>
           </a:p>
@@ -4195,7 +4185,7 @@
           <a:p>
             <a:fld id="{7BF7D500-1223-4445-9EB2-2C72C770F9EB}" type="datetimeFigureOut">
               <a:rPr lang="en-US" smtClean="0"/>
-              <a:t>5/21/2023</a:t>
+              <a:t>2/22/2025</a:t>
             </a:fld>
             <a:endParaRPr lang="en-US"/>
           </a:p>
@@ -4378,7 +4368,7 @@
               <a:pPr>
                 <a:defRPr/>
               </a:pPr>
-              <a:t>5/21/2023</a:t>
+              <a:t>2/22/2025</a:t>
             </a:fld>
             <a:endParaRPr lang="en-US"/>
           </a:p>
@@ -4532,7 +4522,7 @@
           <a:p>
             <a:fld id="{7BF7D500-1223-4445-9EB2-2C72C770F9EB}" type="datetimeFigureOut">
               <a:rPr lang="en-US" smtClean="0"/>
-              <a:t>5/21/2023</a:t>
+              <a:t>2/22/2025</a:t>
             </a:fld>
             <a:endParaRPr lang="en-US"/>
           </a:p>
@@ -4777,7 +4767,7 @@
           <a:p>
             <a:fld id="{7BF7D500-1223-4445-9EB2-2C72C770F9EB}" type="datetimeFigureOut">
               <a:rPr lang="en-US" smtClean="0"/>
-              <a:t>5/21/2023</a:t>
+              <a:t>2/22/2025</a:t>
             </a:fld>
             <a:endParaRPr lang="en-US"/>
           </a:p>
@@ -5006,7 +4996,7 @@
           <a:p>
             <a:fld id="{7BF7D500-1223-4445-9EB2-2C72C770F9EB}" type="datetimeFigureOut">
               <a:rPr lang="en-US" smtClean="0"/>
-              <a:t>5/21/2023</a:t>
+              <a:t>2/22/2025</a:t>
             </a:fld>
             <a:endParaRPr lang="en-US"/>
           </a:p>
@@ -5370,7 +5360,7 @@
           <a:p>
             <a:fld id="{7BF7D500-1223-4445-9EB2-2C72C770F9EB}" type="datetimeFigureOut">
               <a:rPr lang="en-US" smtClean="0"/>
-              <a:t>5/21/2023</a:t>
+              <a:t>2/22/2025</a:t>
             </a:fld>
             <a:endParaRPr lang="en-US"/>
           </a:p>
@@ -5487,7 +5477,7 @@
           <a:p>
             <a:fld id="{7BF7D500-1223-4445-9EB2-2C72C770F9EB}" type="datetimeFigureOut">
               <a:rPr lang="en-US" smtClean="0"/>
-              <a:t>5/21/2023</a:t>
+              <a:t>2/22/2025</a:t>
             </a:fld>
             <a:endParaRPr lang="en-US"/>
           </a:p>
@@ -5582,7 +5572,7 @@
           <a:p>
             <a:fld id="{7BF7D500-1223-4445-9EB2-2C72C770F9EB}" type="datetimeFigureOut">
               <a:rPr lang="en-US" smtClean="0"/>
-              <a:t>5/21/2023</a:t>
+              <a:t>2/22/2025</a:t>
             </a:fld>
             <a:endParaRPr lang="en-US"/>
           </a:p>
@@ -5857,7 +5847,7 @@
           <a:p>
             <a:fld id="{7BF7D500-1223-4445-9EB2-2C72C770F9EB}" type="datetimeFigureOut">
               <a:rPr lang="en-US" smtClean="0"/>
-              <a:t>5/21/2023</a:t>
+              <a:t>2/22/2025</a:t>
             </a:fld>
             <a:endParaRPr lang="en-US"/>
           </a:p>
@@ -6109,7 +6099,7 @@
           <a:p>
             <a:fld id="{7BF7D500-1223-4445-9EB2-2C72C770F9EB}" type="datetimeFigureOut">
               <a:rPr lang="en-US" smtClean="0"/>
-              <a:t>5/21/2023</a:t>
+              <a:t>2/22/2025</a:t>
             </a:fld>
             <a:endParaRPr lang="en-US"/>
           </a:p>
@@ -6277,7 +6267,7 @@
           <a:p>
             <a:fld id="{7BF7D500-1223-4445-9EB2-2C72C770F9EB}" type="datetimeFigureOut">
               <a:rPr lang="en-US" smtClean="0"/>
-              <a:t>5/21/2023</a:t>
+              <a:t>2/22/2025</a:t>
             </a:fld>
             <a:endParaRPr lang="en-US"/>
           </a:p>
@@ -6455,7 +6445,7 @@
           <a:p>
             <a:fld id="{7BF7D500-1223-4445-9EB2-2C72C770F9EB}" type="datetimeFigureOut">
               <a:rPr lang="en-US" smtClean="0"/>
-              <a:t>5/21/2023</a:t>
+              <a:t>2/22/2025</a:t>
             </a:fld>
             <a:endParaRPr lang="en-US"/>
           </a:p>
@@ -6699,7 +6689,7 @@
               <a:pPr>
                 <a:defRPr/>
               </a:pPr>
-              <a:t>5/21/2023</a:t>
+              <a:t>2/22/2025</a:t>
             </a:fld>
             <a:endParaRPr lang="en-US"/>
           </a:p>
@@ -7049,7 +7039,7 @@
               <a:pPr>
                 <a:defRPr/>
               </a:pPr>
-              <a:t>5/21/2023</a:t>
+              <a:t>2/22/2025</a:t>
             </a:fld>
             <a:endParaRPr lang="en-US"/>
           </a:p>
@@ -7213,7 +7203,7 @@
               <a:pPr>
                 <a:defRPr/>
               </a:pPr>
-              <a:t>5/21/2023</a:t>
+              <a:t>2/22/2025</a:t>
             </a:fld>
             <a:endParaRPr lang="en-US"/>
           </a:p>
@@ -7304,7 +7294,7 @@
               <a:pPr>
                 <a:defRPr/>
               </a:pPr>
-              <a:t>5/21/2023</a:t>
+              <a:t>2/22/2025</a:t>
             </a:fld>
             <a:endParaRPr lang="en-US"/>
           </a:p>
@@ -7413,7 +7403,7 @@
               <a:pPr>
                 <a:defRPr/>
               </a:pPr>
-              <a:t>5/21/2023</a:t>
+              <a:t>2/22/2025</a:t>
             </a:fld>
             <a:endParaRPr lang="en-US"/>
           </a:p>
@@ -7598,7 +7588,7 @@
           <a:p>
             <a:fld id="{344494C4-6097-4BA9-B81C-8FE8D10E85BA}" type="datetimeFigureOut">
               <a:rPr lang="en-US" smtClean="0"/>
-              <a:t>5/21/2023</a:t>
+              <a:t>2/22/2025</a:t>
             </a:fld>
             <a:endParaRPr lang="en-US"/>
           </a:p>
@@ -7782,7 +7772,7 @@
           <a:p>
             <a:fld id="{344494C4-6097-4BA9-B81C-8FE8D10E85BA}" type="datetimeFigureOut">
               <a:rPr lang="en-US" smtClean="0"/>
-              <a:t>5/21/2023</a:t>
+              <a:t>2/22/2025</a:t>
             </a:fld>
             <a:endParaRPr lang="en-US"/>
           </a:p>
@@ -8031,7 +8021,7 @@
               <a:pPr>
                 <a:defRPr/>
               </a:pPr>
-              <a:t>5/21/2023</a:t>
+              <a:t>2/22/2025</a:t>
             </a:fld>
             <a:endParaRPr lang="en-US"/>
           </a:p>
@@ -9285,7 +9275,7 @@
           <a:p>
             <a:fld id="{7BF7D500-1223-4445-9EB2-2C72C770F9EB}" type="datetimeFigureOut">
               <a:rPr lang="en-US" smtClean="0"/>
-              <a:t>5/21/2023</a:t>
+              <a:t>2/22/2025</a:t>
             </a:fld>
             <a:endParaRPr lang="en-US"/>
           </a:p>
@@ -11087,8 +11077,8 @@
           </a:p>
         </p:txBody>
       </p:sp>
-      <mc:AlternateContent xmlns:mc="http://schemas.openxmlformats.org/markup-compatibility/2006">
-        <mc:Choice xmlns:a14="http://schemas.microsoft.com/office/drawing/2010/main" Requires="a14">
+      <mc:AlternateContent xmlns:mc="http://schemas.openxmlformats.org/markup-compatibility/2006" xmlns:a14="http://schemas.microsoft.com/office/drawing/2010/main">
+        <mc:Choice Requires="a14">
           <p:sp>
             <p:nvSpPr>
               <p:cNvPr id="3" name="Content Placeholder 2">
@@ -11907,7 +11897,7 @@
             </p:txBody>
           </p:sp>
         </mc:Choice>
-        <mc:Fallback>
+        <mc:Fallback xmlns="">
           <p:sp>
             <p:nvSpPr>
               <p:cNvPr id="3" name="Content Placeholder 2">
@@ -12554,8 +12544,8 @@
           </a:p>
         </p:txBody>
       </p:sp>
-      <mc:AlternateContent xmlns:mc="http://schemas.openxmlformats.org/markup-compatibility/2006">
-        <mc:Choice xmlns:a14="http://schemas.microsoft.com/office/drawing/2010/main" Requires="a14">
+      <mc:AlternateContent xmlns:mc="http://schemas.openxmlformats.org/markup-compatibility/2006" xmlns:a14="http://schemas.microsoft.com/office/drawing/2010/main">
+        <mc:Choice Requires="a14">
           <p:sp>
             <p:nvSpPr>
               <p:cNvPr id="3" name="Content Placeholder 2">
@@ -12735,7 +12725,7 @@
             </p:txBody>
           </p:sp>
         </mc:Choice>
-        <mc:Fallback>
+        <mc:Fallback xmlns="">
           <p:sp>
             <p:nvSpPr>
               <p:cNvPr id="3" name="Content Placeholder 2">
@@ -22547,12 +22537,277 @@
           <a:chExt cx="0" cy="0"/>
         </a:xfrm>
       </p:grpSpPr>
+      <p:sp>
+        <p:nvSpPr>
+          <p:cNvPr id="2" name="Title 1">
+            <a:extLst>
+              <a:ext uri="{FF2B5EF4-FFF2-40B4-BE49-F238E27FC236}">
+                <a16:creationId xmlns:a16="http://schemas.microsoft.com/office/drawing/2014/main" id="{3CEE50E0-BB4C-4E9C-9369-6A01AF8AD160}"/>
+              </a:ext>
+            </a:extLst>
+          </p:cNvPr>
+          <p:cNvSpPr>
+            <a:spLocks noGrp="1"/>
+          </p:cNvSpPr>
+          <p:nvPr>
+            <p:ph type="title"/>
+          </p:nvPr>
+        </p:nvSpPr>
+        <p:spPr/>
+        <p:txBody>
+          <a:bodyPr/>
+          <a:lstStyle/>
+          <a:p>
+            <a:r>
+              <a:rPr lang="en-US" dirty="0"/>
+              <a:t>Example</a:t>
+            </a:r>
+          </a:p>
+        </p:txBody>
+      </p:sp>
+      <mc:AlternateContent xmlns:mc="http://schemas.openxmlformats.org/markup-compatibility/2006" xmlns:a14="http://schemas.microsoft.com/office/drawing/2010/main">
+        <mc:Choice Requires="a14">
+          <p:sp>
+            <p:nvSpPr>
+              <p:cNvPr id="3" name="Content Placeholder 2">
+                <a:extLst>
+                  <a:ext uri="{FF2B5EF4-FFF2-40B4-BE49-F238E27FC236}">
+                    <a16:creationId xmlns:a16="http://schemas.microsoft.com/office/drawing/2014/main" id="{0FAA850B-A3B2-415A-81DF-E7CDF4971D5A}"/>
+                  </a:ext>
+                </a:extLst>
+              </p:cNvPr>
+              <p:cNvSpPr>
+                <a:spLocks noGrp="1"/>
+              </p:cNvSpPr>
+              <p:nvPr>
+                <p:ph sz="quarter" idx="1"/>
+              </p:nvPr>
+            </p:nvSpPr>
+            <p:spPr/>
+            <p:txBody>
+              <a:bodyPr/>
+              <a:lstStyle/>
+              <a:p>
+                <a:r>
+                  <a:rPr lang="en-US" dirty="0">
+                    <a:solidFill>
+                      <a:srgbClr val="C00000"/>
+                    </a:solidFill>
+                  </a:rPr>
+                  <a:t>update</a:t>
+                </a:r>
+                <a:r>
+                  <a:rPr lang="en-US" dirty="0"/>
+                  <a:t>(</a:t>
+                </a:r>
+                <a14:m>
+                  <m:oMath xmlns:m="http://schemas.openxmlformats.org/officeDocument/2006/math">
+                    <m:sSub>
+                      <m:sSubPr>
+                        <m:ctrlPr>
+                          <a:rPr lang="en-US" b="0" i="1" smtClean="0">
+                            <a:latin typeface="Cambria Math" panose="02040503050406030204" pitchFamily="18" charset="0"/>
+                          </a:rPr>
+                        </m:ctrlPr>
+                      </m:sSubPr>
+                      <m:e>
+                        <m:r>
+                          <a:rPr lang="en-US" b="0" i="1" smtClean="0">
+                            <a:latin typeface="Cambria Math" panose="02040503050406030204" pitchFamily="18" charset="0"/>
+                          </a:rPr>
+                          <m:t>𝑢</m:t>
+                        </m:r>
+                      </m:e>
+                      <m:sub>
+                        <m:r>
+                          <a:rPr lang="en-US" b="0" i="1" smtClean="0">
+                            <a:latin typeface="Cambria Math" panose="02040503050406030204" pitchFamily="18" charset="0"/>
+                          </a:rPr>
+                          <m:t>2</m:t>
+                        </m:r>
+                      </m:sub>
+                    </m:sSub>
+                    <m:r>
+                      <a:rPr lang="en-US" b="0" i="1" smtClean="0">
+                        <a:latin typeface="Cambria Math" panose="02040503050406030204" pitchFamily="18" charset="0"/>
+                      </a:rPr>
+                      <m:t>,</m:t>
+                    </m:r>
+                    <m:r>
+                      <a:rPr lang="en-US" b="0" i="1" smtClean="0">
+                        <a:latin typeface="Cambria Math" panose="02040503050406030204" pitchFamily="18" charset="0"/>
+                      </a:rPr>
+                      <m:t>𝑣</m:t>
+                    </m:r>
+                    <m:r>
+                      <a:rPr lang="en-US" b="0" i="1" smtClean="0">
+                        <a:latin typeface="Cambria Math" panose="02040503050406030204" pitchFamily="18" charset="0"/>
+                      </a:rPr>
+                      <m:t>)</m:t>
+                    </m:r>
+                  </m:oMath>
+                </a14:m>
+                <a:r>
+                  <a:rPr lang="en-US" dirty="0"/>
+                  <a:t> </a:t>
+                </a:r>
+              </a:p>
+            </p:txBody>
+          </p:sp>
+        </mc:Choice>
+        <mc:Fallback xmlns="">
+          <p:sp>
+            <p:nvSpPr>
+              <p:cNvPr id="3" name="Content Placeholder 2">
+                <a:extLst>
+                  <a:ext uri="{FF2B5EF4-FFF2-40B4-BE49-F238E27FC236}">
+                    <a16:creationId xmlns:a16="http://schemas.microsoft.com/office/drawing/2014/main" id="{0FAA850B-A3B2-415A-81DF-E7CDF4971D5A}"/>
+                  </a:ext>
+                </a:extLst>
+              </p:cNvPr>
+              <p:cNvSpPr>
+                <a:spLocks noGrp="1" noRot="1" noChangeAspect="1" noMove="1" noResize="1" noEditPoints="1" noAdjustHandles="1" noChangeArrowheads="1" noChangeShapeType="1" noTextEdit="1"/>
+              </p:cNvSpPr>
+              <p:nvPr>
+                <p:ph sz="quarter" idx="1"/>
+              </p:nvPr>
+            </p:nvSpPr>
+            <p:spPr>
+              <a:blipFill>
+                <a:blip r:embed="rId3"/>
+                <a:stretch>
+                  <a:fillRect l="-667" t="-1111"/>
+                </a:stretch>
+              </a:blipFill>
+            </p:spPr>
+            <p:txBody>
+              <a:bodyPr/>
+              <a:lstStyle/>
+              <a:p>
+                <a:r>
+                  <a:rPr lang="en-US">
+                    <a:noFill/>
+                  </a:rPr>
+                  <a:t> </a:t>
+                </a:r>
+              </a:p>
+            </p:txBody>
+          </p:sp>
+        </mc:Fallback>
+      </mc:AlternateContent>
+      <p:pic>
+        <p:nvPicPr>
+          <p:cNvPr id="5" name="Picture 4">
+            <a:extLst>
+              <a:ext uri="{FF2B5EF4-FFF2-40B4-BE49-F238E27FC236}">
+                <a16:creationId xmlns:a16="http://schemas.microsoft.com/office/drawing/2014/main" id="{C78F7F87-2687-4A51-BF9A-15097F8B7786}"/>
+              </a:ext>
+            </a:extLst>
+          </p:cNvPr>
+          <p:cNvPicPr>
+            <a:picLocks noChangeAspect="1"/>
+          </p:cNvPicPr>
+          <p:nvPr/>
+        </p:nvPicPr>
+        <p:blipFill>
+          <a:blip r:embed="rId4"/>
+          <a:stretch>
+            <a:fillRect/>
+          </a:stretch>
+        </p:blipFill>
+        <p:spPr>
+          <a:xfrm>
+            <a:off x="762000" y="2225695"/>
+            <a:ext cx="4066626" cy="3083242"/>
+          </a:xfrm>
+          <a:prstGeom prst="rect">
+            <a:avLst/>
+          </a:prstGeom>
+        </p:spPr>
+      </p:pic>
+      <p:sp>
+        <p:nvSpPr>
+          <p:cNvPr id="14" name="TextBox 13">
+            <a:extLst>
+              <a:ext uri="{FF2B5EF4-FFF2-40B4-BE49-F238E27FC236}">
+                <a16:creationId xmlns:a16="http://schemas.microsoft.com/office/drawing/2014/main" id="{FECA246C-81A3-42FE-AD59-DAEA53326171}"/>
+              </a:ext>
+            </a:extLst>
+          </p:cNvPr>
+          <p:cNvSpPr txBox="1"/>
+          <p:nvPr/>
+        </p:nvSpPr>
+        <p:spPr>
+          <a:xfrm>
+            <a:off x="2010982" y="2005042"/>
+            <a:ext cx="1676400" cy="369332"/>
+          </a:xfrm>
+          <a:prstGeom prst="rect">
+            <a:avLst/>
+          </a:prstGeom>
+          <a:noFill/>
+          <a:ln>
+            <a:solidFill>
+              <a:schemeClr val="tx1"/>
+            </a:solidFill>
+          </a:ln>
+        </p:spPr>
+        <p:txBody>
+          <a:bodyPr wrap="square" rtlCol="0">
+            <a:spAutoFit/>
+          </a:bodyPr>
+          <a:lstStyle/>
+          <a:p>
+            <a:pPr algn="ctr"/>
+            <a:r>
+              <a:rPr lang="en-US" dirty="0"/>
+              <a:t>Before update</a:t>
+            </a:r>
+          </a:p>
+        </p:txBody>
+      </p:sp>
+    </p:spTree>
+    <p:extLst>
+      <p:ext uri="{BB962C8B-B14F-4D97-AF65-F5344CB8AC3E}">
+        <p14:creationId xmlns:p14="http://schemas.microsoft.com/office/powerpoint/2010/main" val="3643587434"/>
+      </p:ext>
+    </p:extLst>
+  </p:cSld>
+  <p:clrMapOvr>
+    <a:masterClrMapping/>
+  </p:clrMapOvr>
+</p:sld>
+</file>
+
+<file path=ppt/slides/slide29.xml><?xml version="1.0" encoding="utf-8"?>
+<p:sld xmlns:a="http://schemas.openxmlformats.org/drawingml/2006/main" xmlns:r="http://schemas.openxmlformats.org/officeDocument/2006/relationships" xmlns:p="http://schemas.openxmlformats.org/presentationml/2006/main">
+  <p:cSld>
+    <p:spTree>
+      <p:nvGrpSpPr>
+        <p:cNvPr id="1" name="">
+          <a:extLst>
+            <a:ext uri="{FF2B5EF4-FFF2-40B4-BE49-F238E27FC236}">
+              <a16:creationId xmlns:a16="http://schemas.microsoft.com/office/drawing/2014/main" id="{A576837E-3044-6F89-2B00-9A64C34D75DF}"/>
+            </a:ext>
+          </a:extLst>
+        </p:cNvPr>
+        <p:cNvGrpSpPr/>
+        <p:nvPr/>
+      </p:nvGrpSpPr>
+      <p:grpSpPr>
+        <a:xfrm>
+          <a:off x="0" y="0"/>
+          <a:ext cx="0" cy="0"/>
+          <a:chOff x="0" y="0"/>
+          <a:chExt cx="0" cy="0"/>
+        </a:xfrm>
+      </p:grpSpPr>
       <p:grpSp>
         <p:nvGrpSpPr>
           <p:cNvPr id="16" name="Group 15">
             <a:extLst>
               <a:ext uri="{FF2B5EF4-FFF2-40B4-BE49-F238E27FC236}">
-                <a16:creationId xmlns:a16="http://schemas.microsoft.com/office/drawing/2014/main" id="{A5550FC3-0238-4E71-999A-7554560B1335}"/>
+                <a16:creationId xmlns:a16="http://schemas.microsoft.com/office/drawing/2014/main" id="{FBF2FBFF-9563-4518-2AAF-28CF79DB4B1C}"/>
               </a:ext>
             </a:extLst>
           </p:cNvPr>
@@ -22572,7 +22827,7 @@
             <p:cNvPr id="12" name="Group 11">
               <a:extLst>
                 <a:ext uri="{FF2B5EF4-FFF2-40B4-BE49-F238E27FC236}">
-                  <a16:creationId xmlns:a16="http://schemas.microsoft.com/office/drawing/2014/main" id="{5B86D65C-8FDD-4C0B-BE3A-37A47E03219F}"/>
+                  <a16:creationId xmlns:a16="http://schemas.microsoft.com/office/drawing/2014/main" id="{B6F6E50A-2C13-6BAF-BFD1-8E92B52AAF82}"/>
                 </a:ext>
               </a:extLst>
             </p:cNvPr>
@@ -22592,7 +22847,7 @@
               <p:cNvPr id="8" name="Picture 7">
                 <a:extLst>
                   <a:ext uri="{FF2B5EF4-FFF2-40B4-BE49-F238E27FC236}">
-                    <a16:creationId xmlns:a16="http://schemas.microsoft.com/office/drawing/2014/main" id="{E17F6F94-CC2B-4476-9C65-AC2F9F63B92E}"/>
+                    <a16:creationId xmlns:a16="http://schemas.microsoft.com/office/drawing/2014/main" id="{5F275AC2-3BD8-18F8-7072-93587CD44D28}"/>
                   </a:ext>
                 </a:extLst>
               </p:cNvPr>
@@ -22622,7 +22877,7 @@
               <p:cNvPr id="6" name="Arrow: Right 5">
                 <a:extLst>
                   <a:ext uri="{FF2B5EF4-FFF2-40B4-BE49-F238E27FC236}">
-                    <a16:creationId xmlns:a16="http://schemas.microsoft.com/office/drawing/2014/main" id="{6790BCC6-85A0-482F-91FE-0BF95243A12F}"/>
+                    <a16:creationId xmlns:a16="http://schemas.microsoft.com/office/drawing/2014/main" id="{388EA1C0-100C-A646-88F6-A647D3A982E5}"/>
                   </a:ext>
                 </a:extLst>
               </p:cNvPr>
@@ -22675,7 +22930,7 @@
             <p:cNvPr id="15" name="TextBox 14">
               <a:extLst>
                 <a:ext uri="{FF2B5EF4-FFF2-40B4-BE49-F238E27FC236}">
-                  <a16:creationId xmlns:a16="http://schemas.microsoft.com/office/drawing/2014/main" id="{89C4F9FC-86A4-438A-B1AC-41D94DF38F52}"/>
+                  <a16:creationId xmlns:a16="http://schemas.microsoft.com/office/drawing/2014/main" id="{6B6D4A7D-D7D5-CCAD-EC46-C1325EE99C28}"/>
                 </a:ext>
               </a:extLst>
             </p:cNvPr>
@@ -22717,7 +22972,7 @@
           <p:cNvPr id="2" name="Title 1">
             <a:extLst>
               <a:ext uri="{FF2B5EF4-FFF2-40B4-BE49-F238E27FC236}">
-                <a16:creationId xmlns:a16="http://schemas.microsoft.com/office/drawing/2014/main" id="{3CEE50E0-BB4C-4E9C-9369-6A01AF8AD160}"/>
+                <a16:creationId xmlns:a16="http://schemas.microsoft.com/office/drawing/2014/main" id="{FB545AB5-18E6-743E-1C4B-30E3F170BF2E}"/>
               </a:ext>
             </a:extLst>
           </p:cNvPr>
@@ -22740,14 +22995,14 @@
           </a:p>
         </p:txBody>
       </p:sp>
-      <mc:AlternateContent xmlns:mc="http://schemas.openxmlformats.org/markup-compatibility/2006" xmlns:a14="http://schemas.microsoft.com/office/drawing/2010/main">
-        <mc:Choice Requires="a14">
+      <mc:AlternateContent xmlns:mc="http://schemas.openxmlformats.org/markup-compatibility/2006">
+        <mc:Choice xmlns:a14="http://schemas.microsoft.com/office/drawing/2010/main" Requires="a14">
           <p:sp>
             <p:nvSpPr>
               <p:cNvPr id="3" name="Content Placeholder 2">
                 <a:extLst>
                   <a:ext uri="{FF2B5EF4-FFF2-40B4-BE49-F238E27FC236}">
-                    <a16:creationId xmlns:a16="http://schemas.microsoft.com/office/drawing/2014/main" id="{0FAA850B-A3B2-415A-81DF-E7CDF4971D5A}"/>
+                    <a16:creationId xmlns:a16="http://schemas.microsoft.com/office/drawing/2014/main" id="{412BB623-696F-CEFA-A749-728F3C21C0E4}"/>
                   </a:ext>
                 </a:extLst>
               </p:cNvPr>
@@ -22830,13 +23085,13 @@
             </p:txBody>
           </p:sp>
         </mc:Choice>
-        <mc:Fallback xmlns="">
+        <mc:Fallback>
           <p:sp>
             <p:nvSpPr>
               <p:cNvPr id="3" name="Content Placeholder 2">
                 <a:extLst>
                   <a:ext uri="{FF2B5EF4-FFF2-40B4-BE49-F238E27FC236}">
-                    <a16:creationId xmlns:a16="http://schemas.microsoft.com/office/drawing/2014/main" id="{0FAA850B-A3B2-415A-81DF-E7CDF4971D5A}"/>
+                    <a16:creationId xmlns:a16="http://schemas.microsoft.com/office/drawing/2014/main" id="{412BB623-696F-CEFA-A749-728F3C21C0E4}"/>
                   </a:ext>
                 </a:extLst>
               </p:cNvPr>
@@ -22851,7 +23106,7 @@
               <a:blipFill>
                 <a:blip r:embed="rId3"/>
                 <a:stretch>
-                  <a:fillRect l="-667" t="-1111"/>
+                  <a:fillRect l="-500" t="-1111"/>
                 </a:stretch>
               </a:blipFill>
             </p:spPr>
@@ -22875,7 +23130,7 @@
           <p:cNvPr id="5" name="Picture 4">
             <a:extLst>
               <a:ext uri="{FF2B5EF4-FFF2-40B4-BE49-F238E27FC236}">
-                <a16:creationId xmlns:a16="http://schemas.microsoft.com/office/drawing/2014/main" id="{C78F7F87-2687-4A51-BF9A-15097F8B7786}"/>
+                <a16:creationId xmlns:a16="http://schemas.microsoft.com/office/drawing/2014/main" id="{3A7626ED-B491-CA58-208D-392191CACCBA}"/>
               </a:ext>
             </a:extLst>
           </p:cNvPr>
@@ -22900,14 +23155,14 @@
           </a:prstGeom>
         </p:spPr>
       </p:pic>
-      <mc:AlternateContent xmlns:mc="http://schemas.openxmlformats.org/markup-compatibility/2006" xmlns:a14="http://schemas.microsoft.com/office/drawing/2010/main">
-        <mc:Choice Requires="a14">
+      <mc:AlternateContent xmlns:mc="http://schemas.openxmlformats.org/markup-compatibility/2006">
+        <mc:Choice xmlns:a14="http://schemas.microsoft.com/office/drawing/2010/main" Requires="a14">
           <p:sp>
             <p:nvSpPr>
               <p:cNvPr id="9" name="TextBox 8">
                 <a:extLst>
                   <a:ext uri="{FF2B5EF4-FFF2-40B4-BE49-F238E27FC236}">
-                    <a16:creationId xmlns:a16="http://schemas.microsoft.com/office/drawing/2014/main" id="{9A564F12-B6E1-4D7F-941B-29446A0C5325}"/>
+                    <a16:creationId xmlns:a16="http://schemas.microsoft.com/office/drawing/2014/main" id="{B34BFBC6-A325-4D93-5466-9AFCECB452EC}"/>
                   </a:ext>
                 </a:extLst>
               </p:cNvPr>
@@ -23258,13 +23513,13 @@
             </p:txBody>
           </p:sp>
         </mc:Choice>
-        <mc:Fallback xmlns="">
+        <mc:Fallback>
           <p:sp>
             <p:nvSpPr>
               <p:cNvPr id="9" name="TextBox 8">
                 <a:extLst>
                   <a:ext uri="{FF2B5EF4-FFF2-40B4-BE49-F238E27FC236}">
-                    <a16:creationId xmlns:a16="http://schemas.microsoft.com/office/drawing/2014/main" id="{9A564F12-B6E1-4D7F-941B-29446A0C5325}"/>
+                    <a16:creationId xmlns:a16="http://schemas.microsoft.com/office/drawing/2014/main" id="{B34BFBC6-A325-4D93-5466-9AFCECB452EC}"/>
                   </a:ext>
                 </a:extLst>
               </p:cNvPr>
@@ -23313,7 +23568,7 @@
           <p:cNvPr id="13" name="Group 12">
             <a:extLst>
               <a:ext uri="{FF2B5EF4-FFF2-40B4-BE49-F238E27FC236}">
-                <a16:creationId xmlns:a16="http://schemas.microsoft.com/office/drawing/2014/main" id="{D5EBA5BC-43A5-46CA-AF91-452EAFD1FC0A}"/>
+                <a16:creationId xmlns:a16="http://schemas.microsoft.com/office/drawing/2014/main" id="{7EFA9DEC-E1A7-EBC9-4340-0E2FE54A536D}"/>
               </a:ext>
             </a:extLst>
           </p:cNvPr>
@@ -23333,7 +23588,7 @@
             <p:cNvPr id="10" name="Arrow: Right 9">
               <a:extLst>
                 <a:ext uri="{FF2B5EF4-FFF2-40B4-BE49-F238E27FC236}">
-                  <a16:creationId xmlns:a16="http://schemas.microsoft.com/office/drawing/2014/main" id="{34CF7FAB-E683-4AA2-A1DA-B793077FE219}"/>
+                  <a16:creationId xmlns:a16="http://schemas.microsoft.com/office/drawing/2014/main" id="{8DDB2FC4-CA60-6AC4-1700-15732231DC1D}"/>
                 </a:ext>
               </a:extLst>
             </p:cNvPr>
@@ -23380,14 +23635,14 @@
             </a:p>
           </p:txBody>
         </p:sp>
-        <mc:AlternateContent xmlns:mc="http://schemas.openxmlformats.org/markup-compatibility/2006" xmlns:a14="http://schemas.microsoft.com/office/drawing/2010/main">
-          <mc:Choice Requires="a14">
+        <mc:AlternateContent xmlns:mc="http://schemas.openxmlformats.org/markup-compatibility/2006">
+          <mc:Choice xmlns:a14="http://schemas.microsoft.com/office/drawing/2010/main" Requires="a14">
             <p:sp>
               <p:nvSpPr>
                 <p:cNvPr id="11" name="TextBox 10">
                   <a:extLst>
                     <a:ext uri="{FF2B5EF4-FFF2-40B4-BE49-F238E27FC236}">
-                      <a16:creationId xmlns:a16="http://schemas.microsoft.com/office/drawing/2014/main" id="{B28857E2-D972-4847-B66D-F6C007C4AD96}"/>
+                      <a16:creationId xmlns:a16="http://schemas.microsoft.com/office/drawing/2014/main" id="{FA9DA988-CF08-DA93-1BD5-7453604F82E9}"/>
                     </a:ext>
                   </a:extLst>
                 </p:cNvPr>
@@ -23603,13 +23858,13 @@
               </p:txBody>
             </p:sp>
           </mc:Choice>
-          <mc:Fallback xmlns="">
+          <mc:Fallback>
             <p:sp>
               <p:nvSpPr>
                 <p:cNvPr id="11" name="TextBox 10">
                   <a:extLst>
                     <a:ext uri="{FF2B5EF4-FFF2-40B4-BE49-F238E27FC236}">
-                      <a16:creationId xmlns:a16="http://schemas.microsoft.com/office/drawing/2014/main" id="{B28857E2-D972-4847-B66D-F6C007C4AD96}"/>
+                      <a16:creationId xmlns:a16="http://schemas.microsoft.com/office/drawing/2014/main" id="{FA9DA988-CF08-DA93-1BD5-7453604F82E9}"/>
                     </a:ext>
                   </a:extLst>
                 </p:cNvPr>
@@ -23659,7 +23914,7 @@
           <p:cNvPr id="14" name="TextBox 13">
             <a:extLst>
               <a:ext uri="{FF2B5EF4-FFF2-40B4-BE49-F238E27FC236}">
-                <a16:creationId xmlns:a16="http://schemas.microsoft.com/office/drawing/2014/main" id="{FECA246C-81A3-42FE-AD59-DAEA53326171}"/>
+                <a16:creationId xmlns:a16="http://schemas.microsoft.com/office/drawing/2014/main" id="{65997B06-4FE4-40B4-1C6F-E9D47A0AD9AA}"/>
               </a:ext>
             </a:extLst>
           </p:cNvPr>
@@ -23698,7 +23953,7 @@
     </p:spTree>
     <p:extLst>
       <p:ext uri="{BB962C8B-B14F-4D97-AF65-F5344CB8AC3E}">
-        <p14:creationId xmlns:p14="http://schemas.microsoft.com/office/powerpoint/2010/main" val="3643587434"/>
+        <p14:creationId xmlns:p14="http://schemas.microsoft.com/office/powerpoint/2010/main" val="743880934"/>
       </p:ext>
     </p:extLst>
   </p:cSld>
@@ -23876,7 +24131,7 @@
 </p:sld>
 </file>
 
-<file path=ppt/slides/slide29.xml><?xml version="1.0" encoding="utf-8"?>
+<file path=ppt/slides/slide3.xml><?xml version="1.0" encoding="utf-8"?>
 <p:sld xmlns:a="http://schemas.openxmlformats.org/drawingml/2006/main" xmlns:r="http://schemas.openxmlformats.org/officeDocument/2006/relationships" xmlns:p="http://schemas.openxmlformats.org/presentationml/2006/main">
   <p:cSld>
     <p:spTree>
@@ -23893,212 +24148,70 @@
           <a:chExt cx="0" cy="0"/>
         </a:xfrm>
       </p:grpSpPr>
-      <p:grpSp>
-        <p:nvGrpSpPr>
-          <p:cNvPr id="14" name="Group 13">
+      <p:sp>
+        <p:nvSpPr>
+          <p:cNvPr id="2" name="Title 1">
             <a:extLst>
               <a:ext uri="{FF2B5EF4-FFF2-40B4-BE49-F238E27FC236}">
-                <a16:creationId xmlns:a16="http://schemas.microsoft.com/office/drawing/2014/main" id="{AD189414-22DD-43C1-86F8-8D8E62556A21}"/>
+                <a16:creationId xmlns:a16="http://schemas.microsoft.com/office/drawing/2014/main" id="{764AD14C-6D94-4048-8030-AF3B00C6ADBA}"/>
               </a:ext>
             </a:extLst>
           </p:cNvPr>
-          <p:cNvGrpSpPr/>
-          <p:nvPr/>
-        </p:nvGrpSpPr>
-        <p:grpSpPr>
+          <p:cNvSpPr>
+            <a:spLocks noGrp="1"/>
+          </p:cNvSpPr>
+          <p:nvPr>
+            <p:ph type="title"/>
+          </p:nvPr>
+        </p:nvSpPr>
+        <p:spPr>
           <a:xfrm>
-            <a:off x="5654817" y="1891690"/>
-            <a:ext cx="4862891" cy="3965955"/>
-            <a:chOff x="4036743" y="1891689"/>
-            <a:chExt cx="4862891" cy="3965955"/>
+            <a:off x="1905000" y="2590800"/>
+            <a:ext cx="8229600" cy="1295400"/>
           </a:xfrm>
-        </p:grpSpPr>
-        <p:grpSp>
-          <p:nvGrpSpPr>
-            <p:cNvPr id="10" name="Group 9">
-              <a:extLst>
-                <a:ext uri="{FF2B5EF4-FFF2-40B4-BE49-F238E27FC236}">
-                  <a16:creationId xmlns:a16="http://schemas.microsoft.com/office/drawing/2014/main" id="{02A90425-9F2D-4C41-BE55-5E84B0D9A249}"/>
-                </a:ext>
-              </a:extLst>
-            </p:cNvPr>
-            <p:cNvGrpSpPr/>
-            <p:nvPr/>
-          </p:nvGrpSpPr>
-          <p:grpSpPr>
-            <a:xfrm>
-              <a:off x="4990479" y="1891689"/>
-              <a:ext cx="3909155" cy="3213711"/>
-              <a:chOff x="228600" y="1891689"/>
-              <a:chExt cx="3909155" cy="3213711"/>
-            </a:xfrm>
-          </p:grpSpPr>
-          <p:pic>
-            <p:nvPicPr>
-              <p:cNvPr id="11" name="Picture 10">
-                <a:extLst>
-                  <a:ext uri="{FF2B5EF4-FFF2-40B4-BE49-F238E27FC236}">
-                    <a16:creationId xmlns:a16="http://schemas.microsoft.com/office/drawing/2014/main" id="{8091D183-790B-4CA8-A664-D12199E2727A}"/>
-                  </a:ext>
-                </a:extLst>
-              </p:cNvPr>
-              <p:cNvPicPr>
-                <a:picLocks noChangeAspect="1"/>
-              </p:cNvPicPr>
-              <p:nvPr/>
-            </p:nvPicPr>
-            <p:blipFill>
-              <a:blip r:embed="rId2"/>
-              <a:stretch>
-                <a:fillRect/>
-              </a:stretch>
-            </p:blipFill>
-            <p:spPr>
-              <a:xfrm>
-                <a:off x="228600" y="2076355"/>
-                <a:ext cx="3909155" cy="3029045"/>
-              </a:xfrm>
-              <a:prstGeom prst="rect">
-                <a:avLst/>
-              </a:prstGeom>
-            </p:spPr>
-          </p:pic>
-          <p:sp>
-            <p:nvSpPr>
-              <p:cNvPr id="12" name="TextBox 11">
-                <a:extLst>
-                  <a:ext uri="{FF2B5EF4-FFF2-40B4-BE49-F238E27FC236}">
-                    <a16:creationId xmlns:a16="http://schemas.microsoft.com/office/drawing/2014/main" id="{F239C3EA-5889-4D69-BCE6-E7DCBDA41539}"/>
-                  </a:ext>
-                </a:extLst>
-              </p:cNvPr>
-              <p:cNvSpPr txBox="1"/>
-              <p:nvPr/>
-            </p:nvSpPr>
-            <p:spPr>
-              <a:xfrm>
-                <a:off x="1248982" y="1891689"/>
-                <a:ext cx="1676400" cy="369332"/>
-              </a:xfrm>
-              <a:prstGeom prst="rect">
-                <a:avLst/>
-              </a:prstGeom>
-              <a:noFill/>
-              <a:ln>
-                <a:solidFill>
-                  <a:schemeClr val="tx1"/>
-                </a:solidFill>
-              </a:ln>
-            </p:spPr>
-            <p:txBody>
-              <a:bodyPr wrap="square" rtlCol="0">
-                <a:spAutoFit/>
-              </a:bodyPr>
-              <a:lstStyle/>
-              <a:p>
-                <a:pPr algn="ctr"/>
-                <a:r>
-                  <a:rPr lang="en-US" dirty="0"/>
-                  <a:t>After update</a:t>
-                </a:r>
-              </a:p>
-            </p:txBody>
-          </p:sp>
-        </p:grpSp>
-        <p:sp>
-          <p:nvSpPr>
-            <p:cNvPr id="9" name="Arrow: Right 8">
-              <a:extLst>
-                <a:ext uri="{FF2B5EF4-FFF2-40B4-BE49-F238E27FC236}">
-                  <a16:creationId xmlns:a16="http://schemas.microsoft.com/office/drawing/2014/main" id="{5F734317-3F86-43A3-BFBB-561238D62E54}"/>
-                </a:ext>
-              </a:extLst>
-            </p:cNvPr>
-            <p:cNvSpPr/>
-            <p:nvPr/>
-          </p:nvSpPr>
-          <p:spPr>
-            <a:xfrm>
-              <a:off x="4036743" y="3428999"/>
-              <a:ext cx="527603" cy="210492"/>
-            </a:xfrm>
-            <a:prstGeom prst="rightArrow">
-              <a:avLst/>
-            </a:prstGeom>
-            <a:noFill/>
-            <a:ln>
-              <a:solidFill>
-                <a:schemeClr val="tx1"/>
-              </a:solidFill>
-            </a:ln>
-          </p:spPr>
-          <p:style>
-            <a:lnRef idx="2">
-              <a:schemeClr val="accent1">
-                <a:shade val="50000"/>
-              </a:schemeClr>
-            </a:lnRef>
-            <a:fillRef idx="1">
-              <a:schemeClr val="accent1"/>
-            </a:fillRef>
-            <a:effectRef idx="0">
-              <a:schemeClr val="accent1"/>
-            </a:effectRef>
-            <a:fontRef idx="minor">
-              <a:schemeClr val="lt1"/>
-            </a:fontRef>
-          </p:style>
-          <p:txBody>
-            <a:bodyPr rtlCol="0" anchor="ctr"/>
-            <a:lstStyle/>
-            <a:p>
-              <a:pPr algn="ctr"/>
-              <a:endParaRPr lang="en-US" dirty="0"/>
-            </a:p>
-          </p:txBody>
-        </p:sp>
-        <p:sp>
-          <p:nvSpPr>
-            <p:cNvPr id="13" name="TextBox 12">
-              <a:extLst>
-                <a:ext uri="{FF2B5EF4-FFF2-40B4-BE49-F238E27FC236}">
-                  <a16:creationId xmlns:a16="http://schemas.microsoft.com/office/drawing/2014/main" id="{B5C907B7-7FD7-4F48-B5DE-0FACF27D1079}"/>
-                </a:ext>
-              </a:extLst>
-            </p:cNvPr>
-            <p:cNvSpPr txBox="1"/>
-            <p:nvPr/>
-          </p:nvSpPr>
-          <p:spPr>
-            <a:xfrm>
-              <a:off x="6010861" y="5488312"/>
-              <a:ext cx="1981200" cy="369332"/>
-            </a:xfrm>
-            <a:prstGeom prst="rect">
-              <a:avLst/>
-            </a:prstGeom>
-            <a:noFill/>
-            <a:ln>
-              <a:solidFill>
-                <a:schemeClr val="tx1"/>
-              </a:solidFill>
-            </a:ln>
-          </p:spPr>
-          <p:txBody>
-            <a:bodyPr wrap="square" rtlCol="0">
-              <a:spAutoFit/>
-            </a:bodyPr>
-            <a:lstStyle/>
-            <a:p>
-              <a:pPr algn="ctr"/>
-              <a:r>
-                <a:rPr lang="en-US" dirty="0"/>
-                <a:t>Do Nothing! </a:t>
-              </a:r>
-            </a:p>
-          </p:txBody>
-        </p:sp>
-      </p:grpSp>
+        </p:spPr>
+        <p:txBody>
+          <a:bodyPr/>
+          <a:lstStyle/>
+          <a:p>
+            <a:pPr algn="ctr"/>
+            <a:r>
+              <a:rPr lang="en-US" dirty="0"/>
+              <a:t>Weighted graphs, and shortest paths in them </a:t>
+            </a:r>
+          </a:p>
+        </p:txBody>
+      </p:sp>
+    </p:spTree>
+    <p:extLst>
+      <p:ext uri="{BB962C8B-B14F-4D97-AF65-F5344CB8AC3E}">
+        <p14:creationId xmlns:p14="http://schemas.microsoft.com/office/powerpoint/2010/main" val="1929170631"/>
+      </p:ext>
+    </p:extLst>
+  </p:cSld>
+  <p:clrMapOvr>
+    <a:masterClrMapping/>
+  </p:clrMapOvr>
+</p:sld>
+</file>
+
+<file path=ppt/slides/slide30.xml><?xml version="1.0" encoding="utf-8"?>
+<p:sld xmlns:a="http://schemas.openxmlformats.org/drawingml/2006/main" xmlns:r="http://schemas.openxmlformats.org/officeDocument/2006/relationships" xmlns:p="http://schemas.openxmlformats.org/presentationml/2006/main">
+  <p:cSld>
+    <p:spTree>
+      <p:nvGrpSpPr>
+        <p:cNvPr id="1" name=""/>
+        <p:cNvGrpSpPr/>
+        <p:nvPr/>
+      </p:nvGrpSpPr>
+      <p:grpSpPr>
+        <a:xfrm>
+          <a:off x="0" y="0"/>
+          <a:ext cx="0" cy="0"/>
+          <a:chOff x="0" y="0"/>
+          <a:chExt cx="0" cy="0"/>
+        </a:xfrm>
+      </p:grpSpPr>
       <p:sp>
         <p:nvSpPr>
           <p:cNvPr id="2" name="Title 1">
@@ -24286,7 +24399,7 @@
             <p:nvPr/>
           </p:nvPicPr>
           <p:blipFill>
-            <a:blip r:embed="rId2"/>
+            <a:blip r:embed="rId4"/>
             <a:stretch>
               <a:fillRect/>
             </a:stretch>
@@ -24343,14 +24456,500 @@
           </p:txBody>
         </p:sp>
       </p:grpSp>
-      <mc:AlternateContent xmlns:mc="http://schemas.openxmlformats.org/markup-compatibility/2006" xmlns:a14="http://schemas.microsoft.com/office/drawing/2010/main">
-        <mc:Choice Requires="a14">
+    </p:spTree>
+    <p:extLst>
+      <p:ext uri="{BB962C8B-B14F-4D97-AF65-F5344CB8AC3E}">
+        <p14:creationId xmlns:p14="http://schemas.microsoft.com/office/powerpoint/2010/main" val="4290351020"/>
+      </p:ext>
+    </p:extLst>
+  </p:cSld>
+  <p:clrMapOvr>
+    <a:masterClrMapping/>
+  </p:clrMapOvr>
+</p:sld>
+</file>
+
+<file path=ppt/slides/slide31.xml><?xml version="1.0" encoding="utf-8"?>
+<p:sld xmlns:a="http://schemas.openxmlformats.org/drawingml/2006/main" xmlns:r="http://schemas.openxmlformats.org/officeDocument/2006/relationships" xmlns:p="http://schemas.openxmlformats.org/presentationml/2006/main">
+  <p:cSld>
+    <p:spTree>
+      <p:nvGrpSpPr>
+        <p:cNvPr id="1" name="">
+          <a:extLst>
+            <a:ext uri="{FF2B5EF4-FFF2-40B4-BE49-F238E27FC236}">
+              <a16:creationId xmlns:a16="http://schemas.microsoft.com/office/drawing/2014/main" id="{8B3D335F-8223-6937-6658-3E742D6B7576}"/>
+            </a:ext>
+          </a:extLst>
+        </p:cNvPr>
+        <p:cNvGrpSpPr/>
+        <p:nvPr/>
+      </p:nvGrpSpPr>
+      <p:grpSpPr>
+        <a:xfrm>
+          <a:off x="0" y="0"/>
+          <a:ext cx="0" cy="0"/>
+          <a:chOff x="0" y="0"/>
+          <a:chExt cx="0" cy="0"/>
+        </a:xfrm>
+      </p:grpSpPr>
+      <p:grpSp>
+        <p:nvGrpSpPr>
+          <p:cNvPr id="14" name="Group 13">
+            <a:extLst>
+              <a:ext uri="{FF2B5EF4-FFF2-40B4-BE49-F238E27FC236}">
+                <a16:creationId xmlns:a16="http://schemas.microsoft.com/office/drawing/2014/main" id="{E12C4462-BFCE-6BB2-F1D0-DCC746116433}"/>
+              </a:ext>
+            </a:extLst>
+          </p:cNvPr>
+          <p:cNvGrpSpPr/>
+          <p:nvPr/>
+        </p:nvGrpSpPr>
+        <p:grpSpPr>
+          <a:xfrm>
+            <a:off x="5654817" y="1891690"/>
+            <a:ext cx="4862891" cy="3965955"/>
+            <a:chOff x="4036743" y="1891689"/>
+            <a:chExt cx="4862891" cy="3965955"/>
+          </a:xfrm>
+        </p:grpSpPr>
+        <p:grpSp>
+          <p:nvGrpSpPr>
+            <p:cNvPr id="10" name="Group 9">
+              <a:extLst>
+                <a:ext uri="{FF2B5EF4-FFF2-40B4-BE49-F238E27FC236}">
+                  <a16:creationId xmlns:a16="http://schemas.microsoft.com/office/drawing/2014/main" id="{AF9BC6B6-3F0F-7BC7-D581-7DA9A8EA4929}"/>
+                </a:ext>
+              </a:extLst>
+            </p:cNvPr>
+            <p:cNvGrpSpPr/>
+            <p:nvPr/>
+          </p:nvGrpSpPr>
+          <p:grpSpPr>
+            <a:xfrm>
+              <a:off x="4990479" y="1891689"/>
+              <a:ext cx="3909155" cy="3213711"/>
+              <a:chOff x="228600" y="1891689"/>
+              <a:chExt cx="3909155" cy="3213711"/>
+            </a:xfrm>
+          </p:grpSpPr>
+          <p:pic>
+            <p:nvPicPr>
+              <p:cNvPr id="11" name="Picture 10">
+                <a:extLst>
+                  <a:ext uri="{FF2B5EF4-FFF2-40B4-BE49-F238E27FC236}">
+                    <a16:creationId xmlns:a16="http://schemas.microsoft.com/office/drawing/2014/main" id="{8AA5E218-0B27-3A4D-4E79-75B4581F3E29}"/>
+                  </a:ext>
+                </a:extLst>
+              </p:cNvPr>
+              <p:cNvPicPr>
+                <a:picLocks noChangeAspect="1"/>
+              </p:cNvPicPr>
+              <p:nvPr/>
+            </p:nvPicPr>
+            <p:blipFill>
+              <a:blip r:embed="rId2"/>
+              <a:stretch>
+                <a:fillRect/>
+              </a:stretch>
+            </p:blipFill>
+            <p:spPr>
+              <a:xfrm>
+                <a:off x="228600" y="2076355"/>
+                <a:ext cx="3909155" cy="3029045"/>
+              </a:xfrm>
+              <a:prstGeom prst="rect">
+                <a:avLst/>
+              </a:prstGeom>
+            </p:spPr>
+          </p:pic>
+          <p:sp>
+            <p:nvSpPr>
+              <p:cNvPr id="12" name="TextBox 11">
+                <a:extLst>
+                  <a:ext uri="{FF2B5EF4-FFF2-40B4-BE49-F238E27FC236}">
+                    <a16:creationId xmlns:a16="http://schemas.microsoft.com/office/drawing/2014/main" id="{0CBB7EC2-3A9A-67EA-505F-BD15F2E8CCA9}"/>
+                  </a:ext>
+                </a:extLst>
+              </p:cNvPr>
+              <p:cNvSpPr txBox="1"/>
+              <p:nvPr/>
+            </p:nvSpPr>
+            <p:spPr>
+              <a:xfrm>
+                <a:off x="1248982" y="1891689"/>
+                <a:ext cx="1676400" cy="369332"/>
+              </a:xfrm>
+              <a:prstGeom prst="rect">
+                <a:avLst/>
+              </a:prstGeom>
+              <a:noFill/>
+              <a:ln>
+                <a:solidFill>
+                  <a:schemeClr val="tx1"/>
+                </a:solidFill>
+              </a:ln>
+            </p:spPr>
+            <p:txBody>
+              <a:bodyPr wrap="square" rtlCol="0">
+                <a:spAutoFit/>
+              </a:bodyPr>
+              <a:lstStyle/>
+              <a:p>
+                <a:pPr algn="ctr"/>
+                <a:r>
+                  <a:rPr lang="en-US" dirty="0"/>
+                  <a:t>After update</a:t>
+                </a:r>
+              </a:p>
+            </p:txBody>
+          </p:sp>
+        </p:grpSp>
+        <p:sp>
+          <p:nvSpPr>
+            <p:cNvPr id="9" name="Arrow: Right 8">
+              <a:extLst>
+                <a:ext uri="{FF2B5EF4-FFF2-40B4-BE49-F238E27FC236}">
+                  <a16:creationId xmlns:a16="http://schemas.microsoft.com/office/drawing/2014/main" id="{AE41E7AB-B448-9223-0F32-872848EEBDF5}"/>
+                </a:ext>
+              </a:extLst>
+            </p:cNvPr>
+            <p:cNvSpPr/>
+            <p:nvPr/>
+          </p:nvSpPr>
+          <p:spPr>
+            <a:xfrm>
+              <a:off x="4036743" y="3428999"/>
+              <a:ext cx="527603" cy="210492"/>
+            </a:xfrm>
+            <a:prstGeom prst="rightArrow">
+              <a:avLst/>
+            </a:prstGeom>
+            <a:noFill/>
+            <a:ln>
+              <a:solidFill>
+                <a:schemeClr val="tx1"/>
+              </a:solidFill>
+            </a:ln>
+          </p:spPr>
+          <p:style>
+            <a:lnRef idx="2">
+              <a:schemeClr val="accent1">
+                <a:shade val="50000"/>
+              </a:schemeClr>
+            </a:lnRef>
+            <a:fillRef idx="1">
+              <a:schemeClr val="accent1"/>
+            </a:fillRef>
+            <a:effectRef idx="0">
+              <a:schemeClr val="accent1"/>
+            </a:effectRef>
+            <a:fontRef idx="minor">
+              <a:schemeClr val="lt1"/>
+            </a:fontRef>
+          </p:style>
+          <p:txBody>
+            <a:bodyPr rtlCol="0" anchor="ctr"/>
+            <a:lstStyle/>
+            <a:p>
+              <a:pPr algn="ctr"/>
+              <a:endParaRPr lang="en-US" dirty="0"/>
+            </a:p>
+          </p:txBody>
+        </p:sp>
+        <p:sp>
+          <p:nvSpPr>
+            <p:cNvPr id="13" name="TextBox 12">
+              <a:extLst>
+                <a:ext uri="{FF2B5EF4-FFF2-40B4-BE49-F238E27FC236}">
+                  <a16:creationId xmlns:a16="http://schemas.microsoft.com/office/drawing/2014/main" id="{3D414C1C-839E-CF84-C0FE-863F243EFCEE}"/>
+                </a:ext>
+              </a:extLst>
+            </p:cNvPr>
+            <p:cNvSpPr txBox="1"/>
+            <p:nvPr/>
+          </p:nvSpPr>
+          <p:spPr>
+            <a:xfrm>
+              <a:off x="6010861" y="5488312"/>
+              <a:ext cx="1981200" cy="369332"/>
+            </a:xfrm>
+            <a:prstGeom prst="rect">
+              <a:avLst/>
+            </a:prstGeom>
+            <a:noFill/>
+            <a:ln>
+              <a:solidFill>
+                <a:schemeClr val="tx1"/>
+              </a:solidFill>
+            </a:ln>
+          </p:spPr>
+          <p:txBody>
+            <a:bodyPr wrap="square" rtlCol="0">
+              <a:spAutoFit/>
+            </a:bodyPr>
+            <a:lstStyle/>
+            <a:p>
+              <a:pPr algn="ctr"/>
+              <a:r>
+                <a:rPr lang="en-US" dirty="0"/>
+                <a:t>Do Nothing! </a:t>
+              </a:r>
+            </a:p>
+          </p:txBody>
+        </p:sp>
+      </p:grpSp>
+      <p:sp>
+        <p:nvSpPr>
+          <p:cNvPr id="2" name="Title 1">
+            <a:extLst>
+              <a:ext uri="{FF2B5EF4-FFF2-40B4-BE49-F238E27FC236}">
+                <a16:creationId xmlns:a16="http://schemas.microsoft.com/office/drawing/2014/main" id="{1106CEAA-605F-F53C-3E18-2A31B6E083E7}"/>
+              </a:ext>
+            </a:extLst>
+          </p:cNvPr>
+          <p:cNvSpPr>
+            <a:spLocks noGrp="1"/>
+          </p:cNvSpPr>
+          <p:nvPr>
+            <p:ph type="title"/>
+          </p:nvPr>
+        </p:nvSpPr>
+        <p:spPr/>
+        <p:txBody>
+          <a:bodyPr/>
+          <a:lstStyle/>
+          <a:p>
+            <a:r>
+              <a:rPr lang="en-US" dirty="0"/>
+              <a:t>Another Example</a:t>
+            </a:r>
+          </a:p>
+        </p:txBody>
+      </p:sp>
+      <mc:AlternateContent xmlns:mc="http://schemas.openxmlformats.org/markup-compatibility/2006">
+        <mc:Choice xmlns:a14="http://schemas.microsoft.com/office/drawing/2010/main" Requires="a14">
+          <p:sp>
+            <p:nvSpPr>
+              <p:cNvPr id="3" name="Content Placeholder 2">
+                <a:extLst>
+                  <a:ext uri="{FF2B5EF4-FFF2-40B4-BE49-F238E27FC236}">
+                    <a16:creationId xmlns:a16="http://schemas.microsoft.com/office/drawing/2014/main" id="{F316A920-10F2-593E-3245-B1F748C5A3D8}"/>
+                  </a:ext>
+                </a:extLst>
+              </p:cNvPr>
+              <p:cNvSpPr>
+                <a:spLocks noGrp="1"/>
+              </p:cNvSpPr>
+              <p:nvPr>
+                <p:ph sz="quarter" idx="1"/>
+              </p:nvPr>
+            </p:nvSpPr>
+            <p:spPr/>
+            <p:txBody>
+              <a:bodyPr/>
+              <a:lstStyle/>
+              <a:p>
+                <a:r>
+                  <a:rPr lang="en-US" dirty="0">
+                    <a:solidFill>
+                      <a:srgbClr val="C00000"/>
+                    </a:solidFill>
+                  </a:rPr>
+                  <a:t>update</a:t>
+                </a:r>
+                <a:r>
+                  <a:rPr lang="en-US" dirty="0"/>
+                  <a:t>(</a:t>
+                </a:r>
+                <a14:m>
+                  <m:oMath xmlns:m="http://schemas.openxmlformats.org/officeDocument/2006/math">
+                    <m:sSub>
+                      <m:sSubPr>
+                        <m:ctrlPr>
+                          <a:rPr lang="en-US" b="0" i="1" smtClean="0">
+                            <a:latin typeface="Cambria Math" panose="02040503050406030204" pitchFamily="18" charset="0"/>
+                          </a:rPr>
+                        </m:ctrlPr>
+                      </m:sSubPr>
+                      <m:e>
+                        <m:r>
+                          <a:rPr lang="en-US" b="0" i="1" smtClean="0">
+                            <a:latin typeface="Cambria Math" panose="02040503050406030204" pitchFamily="18" charset="0"/>
+                          </a:rPr>
+                          <m:t>𝑢</m:t>
+                        </m:r>
+                      </m:e>
+                      <m:sub>
+                        <m:r>
+                          <a:rPr lang="en-US" b="0" i="1" smtClean="0">
+                            <a:latin typeface="Cambria Math" panose="02040503050406030204" pitchFamily="18" charset="0"/>
+                          </a:rPr>
+                          <m:t>2</m:t>
+                        </m:r>
+                      </m:sub>
+                    </m:sSub>
+                    <m:r>
+                      <a:rPr lang="en-US" b="0" i="1" smtClean="0">
+                        <a:latin typeface="Cambria Math" panose="02040503050406030204" pitchFamily="18" charset="0"/>
+                      </a:rPr>
+                      <m:t>,</m:t>
+                    </m:r>
+                    <m:r>
+                      <a:rPr lang="en-US" b="0" i="1" smtClean="0">
+                        <a:latin typeface="Cambria Math" panose="02040503050406030204" pitchFamily="18" charset="0"/>
+                      </a:rPr>
+                      <m:t>𝑣</m:t>
+                    </m:r>
+                  </m:oMath>
+                </a14:m>
+                <a:r>
+                  <a:rPr lang="en-US" dirty="0"/>
+                  <a:t>)</a:t>
+                </a:r>
+              </a:p>
+            </p:txBody>
+          </p:sp>
+        </mc:Choice>
+        <mc:Fallback>
+          <p:sp>
+            <p:nvSpPr>
+              <p:cNvPr id="3" name="Content Placeholder 2">
+                <a:extLst>
+                  <a:ext uri="{FF2B5EF4-FFF2-40B4-BE49-F238E27FC236}">
+                    <a16:creationId xmlns:a16="http://schemas.microsoft.com/office/drawing/2014/main" id="{F316A920-10F2-593E-3245-B1F748C5A3D8}"/>
+                  </a:ext>
+                </a:extLst>
+              </p:cNvPr>
+              <p:cNvSpPr>
+                <a:spLocks noGrp="1" noRot="1" noChangeAspect="1" noMove="1" noResize="1" noEditPoints="1" noAdjustHandles="1" noChangeArrowheads="1" noChangeShapeType="1" noTextEdit="1"/>
+              </p:cNvSpPr>
+              <p:nvPr>
+                <p:ph sz="quarter" idx="1"/>
+              </p:nvPr>
+            </p:nvSpPr>
+            <p:spPr>
+              <a:blipFill>
+                <a:blip r:embed="rId3"/>
+                <a:stretch>
+                  <a:fillRect l="-500" t="-1111"/>
+                </a:stretch>
+              </a:blipFill>
+            </p:spPr>
+            <p:txBody>
+              <a:bodyPr/>
+              <a:lstStyle/>
+              <a:p>
+                <a:r>
+                  <a:rPr lang="en-US">
+                    <a:noFill/>
+                  </a:rPr>
+                  <a:t> </a:t>
+                </a:r>
+              </a:p>
+            </p:txBody>
+          </p:sp>
+        </mc:Fallback>
+      </mc:AlternateContent>
+      <p:grpSp>
+        <p:nvGrpSpPr>
+          <p:cNvPr id="8" name="Group 7">
+            <a:extLst>
+              <a:ext uri="{FF2B5EF4-FFF2-40B4-BE49-F238E27FC236}">
+                <a16:creationId xmlns:a16="http://schemas.microsoft.com/office/drawing/2014/main" id="{8E120DC8-D5D4-A861-1D64-68A2D10CF94C}"/>
+              </a:ext>
+            </a:extLst>
+          </p:cNvPr>
+          <p:cNvGrpSpPr/>
+          <p:nvPr/>
+        </p:nvGrpSpPr>
+        <p:grpSpPr>
+          <a:xfrm>
+            <a:off x="990600" y="1891690"/>
+            <a:ext cx="3909155" cy="3213711"/>
+            <a:chOff x="228600" y="1891689"/>
+            <a:chExt cx="3909155" cy="3213711"/>
+          </a:xfrm>
+        </p:grpSpPr>
+        <p:pic>
+          <p:nvPicPr>
+            <p:cNvPr id="5" name="Picture 4">
+              <a:extLst>
+                <a:ext uri="{FF2B5EF4-FFF2-40B4-BE49-F238E27FC236}">
+                  <a16:creationId xmlns:a16="http://schemas.microsoft.com/office/drawing/2014/main" id="{6858345D-4596-FC53-9C62-B0891A38A946}"/>
+                </a:ext>
+              </a:extLst>
+            </p:cNvPr>
+            <p:cNvPicPr>
+              <a:picLocks noChangeAspect="1"/>
+            </p:cNvPicPr>
+            <p:nvPr/>
+          </p:nvPicPr>
+          <p:blipFill>
+            <a:blip r:embed="rId2"/>
+            <a:stretch>
+              <a:fillRect/>
+            </a:stretch>
+          </p:blipFill>
+          <p:spPr>
+            <a:xfrm>
+              <a:off x="228600" y="2076355"/>
+              <a:ext cx="3909155" cy="3029045"/>
+            </a:xfrm>
+            <a:prstGeom prst="rect">
+              <a:avLst/>
+            </a:prstGeom>
+          </p:spPr>
+        </p:pic>
+        <p:sp>
+          <p:nvSpPr>
+            <p:cNvPr id="6" name="TextBox 5">
+              <a:extLst>
+                <a:ext uri="{FF2B5EF4-FFF2-40B4-BE49-F238E27FC236}">
+                  <a16:creationId xmlns:a16="http://schemas.microsoft.com/office/drawing/2014/main" id="{35E0F39E-F79B-F810-6CFF-DBF3DDCA70A6}"/>
+                </a:ext>
+              </a:extLst>
+            </p:cNvPr>
+            <p:cNvSpPr txBox="1"/>
+            <p:nvPr/>
+          </p:nvSpPr>
+          <p:spPr>
+            <a:xfrm>
+              <a:off x="1248982" y="1891689"/>
+              <a:ext cx="1676400" cy="369332"/>
+            </a:xfrm>
+            <a:prstGeom prst="rect">
+              <a:avLst/>
+            </a:prstGeom>
+            <a:noFill/>
+            <a:ln>
+              <a:solidFill>
+                <a:schemeClr val="tx1"/>
+              </a:solidFill>
+            </a:ln>
+          </p:spPr>
+          <p:txBody>
+            <a:bodyPr wrap="square" rtlCol="0">
+              <a:spAutoFit/>
+            </a:bodyPr>
+            <a:lstStyle/>
+            <a:p>
+              <a:pPr algn="ctr"/>
+              <a:r>
+                <a:rPr lang="en-US" dirty="0"/>
+                <a:t>Before update</a:t>
+              </a:r>
+            </a:p>
+          </p:txBody>
+        </p:sp>
+      </p:grpSp>
+      <mc:AlternateContent xmlns:mc="http://schemas.openxmlformats.org/markup-compatibility/2006">
+        <mc:Choice xmlns:a14="http://schemas.microsoft.com/office/drawing/2010/main" Requires="a14">
           <p:sp>
             <p:nvSpPr>
               <p:cNvPr id="7" name="TextBox 6">
                 <a:extLst>
                   <a:ext uri="{FF2B5EF4-FFF2-40B4-BE49-F238E27FC236}">
-                    <a16:creationId xmlns:a16="http://schemas.microsoft.com/office/drawing/2014/main" id="{0B8DE584-9AF9-43B6-94BB-B671DCED8941}"/>
+                    <a16:creationId xmlns:a16="http://schemas.microsoft.com/office/drawing/2014/main" id="{D93489B5-DD76-B0C8-FA02-D40E29FCB48A}"/>
                   </a:ext>
                 </a:extLst>
               </p:cNvPr>
@@ -24766,13 +25365,13 @@
             </p:txBody>
           </p:sp>
         </mc:Choice>
-        <mc:Fallback xmlns="">
+        <mc:Fallback>
           <p:sp>
             <p:nvSpPr>
               <p:cNvPr id="7" name="TextBox 6">
                 <a:extLst>
                   <a:ext uri="{FF2B5EF4-FFF2-40B4-BE49-F238E27FC236}">
-                    <a16:creationId xmlns:a16="http://schemas.microsoft.com/office/drawing/2014/main" id="{0B8DE584-9AF9-43B6-94BB-B671DCED8941}"/>
+                    <a16:creationId xmlns:a16="http://schemas.microsoft.com/office/drawing/2014/main" id="{D93489B5-DD76-B0C8-FA02-D40E29FCB48A}"/>
                   </a:ext>
                 </a:extLst>
               </p:cNvPr>
@@ -24819,7 +25418,7 @@
     </p:spTree>
     <p:extLst>
       <p:ext uri="{BB962C8B-B14F-4D97-AF65-F5344CB8AC3E}">
-        <p14:creationId xmlns:p14="http://schemas.microsoft.com/office/powerpoint/2010/main" val="4290351020"/>
+        <p14:creationId xmlns:p14="http://schemas.microsoft.com/office/powerpoint/2010/main" val="521505446"/>
       </p:ext>
     </p:extLst>
   </p:cSld>
@@ -24952,71 +25551,7 @@
 </p:sld>
 </file>
 
-<file path=ppt/slides/slide3.xml><?xml version="1.0" encoding="utf-8"?>
-<p:sld xmlns:a="http://schemas.openxmlformats.org/drawingml/2006/main" xmlns:r="http://schemas.openxmlformats.org/officeDocument/2006/relationships" xmlns:p="http://schemas.openxmlformats.org/presentationml/2006/main">
-  <p:cSld>
-    <p:spTree>
-      <p:nvGrpSpPr>
-        <p:cNvPr id="1" name=""/>
-        <p:cNvGrpSpPr/>
-        <p:nvPr/>
-      </p:nvGrpSpPr>
-      <p:grpSpPr>
-        <a:xfrm>
-          <a:off x="0" y="0"/>
-          <a:ext cx="0" cy="0"/>
-          <a:chOff x="0" y="0"/>
-          <a:chExt cx="0" cy="0"/>
-        </a:xfrm>
-      </p:grpSpPr>
-      <p:sp>
-        <p:nvSpPr>
-          <p:cNvPr id="2" name="Title 1">
-            <a:extLst>
-              <a:ext uri="{FF2B5EF4-FFF2-40B4-BE49-F238E27FC236}">
-                <a16:creationId xmlns:a16="http://schemas.microsoft.com/office/drawing/2014/main" id="{764AD14C-6D94-4048-8030-AF3B00C6ADBA}"/>
-              </a:ext>
-            </a:extLst>
-          </p:cNvPr>
-          <p:cNvSpPr>
-            <a:spLocks noGrp="1"/>
-          </p:cNvSpPr>
-          <p:nvPr>
-            <p:ph type="title"/>
-          </p:nvPr>
-        </p:nvSpPr>
-        <p:spPr>
-          <a:xfrm>
-            <a:off x="1905000" y="2590800"/>
-            <a:ext cx="8229600" cy="1295400"/>
-          </a:xfrm>
-        </p:spPr>
-        <p:txBody>
-          <a:bodyPr/>
-          <a:lstStyle/>
-          <a:p>
-            <a:pPr algn="ctr"/>
-            <a:r>
-              <a:rPr lang="en-US" dirty="0"/>
-              <a:t>Weighted graphs, and shortest paths in them </a:t>
-            </a:r>
-          </a:p>
-        </p:txBody>
-      </p:sp>
-    </p:spTree>
-    <p:extLst>
-      <p:ext uri="{BB962C8B-B14F-4D97-AF65-F5344CB8AC3E}">
-        <p14:creationId xmlns:p14="http://schemas.microsoft.com/office/powerpoint/2010/main" val="1929170631"/>
-      </p:ext>
-    </p:extLst>
-  </p:cSld>
-  <p:clrMapOvr>
-    <a:masterClrMapping/>
-  </p:clrMapOvr>
-</p:sld>
-</file>
-
-<file path=ppt/slides/slide30.xml><?xml version="1.0" encoding="utf-8"?>
+<file path=ppt/slides/slide32.xml><?xml version="1.0" encoding="utf-8"?>
 <p:sld xmlns:a="http://schemas.openxmlformats.org/drawingml/2006/main" xmlns:r="http://schemas.openxmlformats.org/officeDocument/2006/relationships" xmlns:p="http://schemas.openxmlformats.org/presentationml/2006/main">
   <p:cSld>
     <p:spTree>
@@ -25112,7 +25647,7 @@
             <a:r>
               <a:rPr lang="en-US" dirty="0" err="1">
                 <a:solidFill>
-                  <a:schemeClr val="tx1"/>
+                  <a:srgbClr val="00B050"/>
                 </a:solidFill>
                 <a:latin typeface="Abadi" panose="020B0604020104020204" pitchFamily="34" charset="0"/>
               </a:rPr>
@@ -25170,7 +25705,7 @@
 </p:sld>
 </file>
 
-<file path=ppt/slides/slide31.xml><?xml version="1.0" encoding="utf-8"?>
+<file path=ppt/slides/slide33.xml><?xml version="1.0" encoding="utf-8"?>
 <p:sld xmlns:a="http://schemas.openxmlformats.org/drawingml/2006/main" xmlns:r="http://schemas.openxmlformats.org/officeDocument/2006/relationships" xmlns:p="http://schemas.openxmlformats.org/presentationml/2006/main">
   <p:cSld>
     <p:spTree>
@@ -25284,111 +25819,6 @@
           </a:p>
         </p:txBody>
       </p:sp>
-      <mc:AlternateContent xmlns:mc="http://schemas.openxmlformats.org/markup-compatibility/2006" xmlns:a14="http://schemas.microsoft.com/office/drawing/2010/main">
-        <mc:Choice Requires="a14">
-          <p:sp>
-            <p:nvSpPr>
-              <p:cNvPr id="7" name="TextBox 6">
-                <a:extLst>
-                  <a:ext uri="{FF2B5EF4-FFF2-40B4-BE49-F238E27FC236}">
-                    <a16:creationId xmlns:a16="http://schemas.microsoft.com/office/drawing/2014/main" id="{DC4272D8-C8D6-49E9-99E3-9A083F761AA3}"/>
-                  </a:ext>
-                </a:extLst>
-              </p:cNvPr>
-              <p:cNvSpPr txBox="1"/>
-              <p:nvPr/>
-            </p:nvSpPr>
-            <p:spPr>
-              <a:xfrm>
-                <a:off x="4876800" y="4948536"/>
-                <a:ext cx="685800" cy="461665"/>
-              </a:xfrm>
-              <a:prstGeom prst="rect">
-                <a:avLst/>
-              </a:prstGeom>
-              <a:noFill/>
-            </p:spPr>
-            <p:txBody>
-              <a:bodyPr wrap="square" rtlCol="0">
-                <a:spAutoFit/>
-              </a:bodyPr>
-              <a:lstStyle/>
-              <a:p>
-                <a:pPr/>
-                <a14:m>
-                  <m:oMathPara xmlns:m="http://schemas.openxmlformats.org/officeDocument/2006/math">
-                    <m:oMathParaPr>
-                      <m:jc m:val="centerGroup"/>
-                    </m:oMathParaPr>
-                    <m:oMath xmlns:m="http://schemas.openxmlformats.org/officeDocument/2006/math">
-                      <m:r>
-                        <m:rPr>
-                          <m:sty m:val="p"/>
-                        </m:rPr>
-                        <a:rPr lang="en-US" sz="2400">
-                          <a:latin typeface="Cambria Math" panose="02040503050406030204" pitchFamily="18" charset="0"/>
-                        </a:rPr>
-                        <m:t>Θ</m:t>
-                      </m:r>
-                      <m:r>
-                        <a:rPr lang="en-US" sz="2400" i="1">
-                          <a:latin typeface="Cambria Math" panose="02040503050406030204" pitchFamily="18" charset="0"/>
-                        </a:rPr>
-                        <m:t>(1)</m:t>
-                      </m:r>
-                    </m:oMath>
-                  </m:oMathPara>
-                </a14:m>
-                <a:endParaRPr lang="en-US" dirty="0"/>
-              </a:p>
-            </p:txBody>
-          </p:sp>
-        </mc:Choice>
-        <mc:Fallback xmlns="">
-          <p:sp>
-            <p:nvSpPr>
-              <p:cNvPr id="7" name="TextBox 6">
-                <a:extLst>
-                  <a:ext uri="{FF2B5EF4-FFF2-40B4-BE49-F238E27FC236}">
-                    <a16:creationId xmlns:a16="http://schemas.microsoft.com/office/drawing/2014/main" id="{DC4272D8-C8D6-49E9-99E3-9A083F761AA3}"/>
-                  </a:ext>
-                </a:extLst>
-              </p:cNvPr>
-              <p:cNvSpPr txBox="1">
-                <a:spLocks noRot="1" noChangeAspect="1" noMove="1" noResize="1" noEditPoints="1" noAdjustHandles="1" noChangeArrowheads="1" noChangeShapeType="1" noTextEdit="1"/>
-              </p:cNvSpPr>
-              <p:nvPr/>
-            </p:nvSpPr>
-            <p:spPr>
-              <a:xfrm>
-                <a:off x="4876800" y="4948536"/>
-                <a:ext cx="685800" cy="461665"/>
-              </a:xfrm>
-              <a:prstGeom prst="rect">
-                <a:avLst/>
-              </a:prstGeom>
-              <a:blipFill>
-                <a:blip r:embed="rId3"/>
-                <a:stretch>
-                  <a:fillRect l="-1770" r="-24779" b="-19737"/>
-                </a:stretch>
-              </a:blipFill>
-            </p:spPr>
-            <p:txBody>
-              <a:bodyPr/>
-              <a:lstStyle/>
-              <a:p>
-                <a:r>
-                  <a:rPr lang="en-US">
-                    <a:noFill/>
-                  </a:rPr>
-                  <a:t> </a:t>
-                </a:r>
-              </a:p>
-            </p:txBody>
-          </p:sp>
-        </mc:Fallback>
-      </mc:AlternateContent>
     </p:spTree>
     <p:extLst>
       <p:ext uri="{BB962C8B-B14F-4D97-AF65-F5344CB8AC3E}">
@@ -25452,51 +25882,6 @@
                       </p:childTnLst>
                     </p:cTn>
                   </p:par>
-                  <p:par>
-                    <p:cTn id="7" fill="hold">
-                      <p:stCondLst>
-                        <p:cond delay="indefinite"/>
-                      </p:stCondLst>
-                      <p:childTnLst>
-                        <p:par>
-                          <p:cTn id="8" fill="hold">
-                            <p:stCondLst>
-                              <p:cond delay="0"/>
-                            </p:stCondLst>
-                            <p:childTnLst>
-                              <p:par>
-                                <p:cTn id="9" presetID="1" presetClass="entr" presetSubtype="0" fill="hold" grpId="0" nodeType="clickEffect">
-                                  <p:stCondLst>
-                                    <p:cond delay="0"/>
-                                  </p:stCondLst>
-                                  <p:childTnLst>
-                                    <p:set>
-                                      <p:cBhvr>
-                                        <p:cTn id="10" dur="1" fill="hold">
-                                          <p:stCondLst>
-                                            <p:cond delay="0"/>
-                                          </p:stCondLst>
-                                        </p:cTn>
-                                        <p:tgtEl>
-                                          <p:spTgt spid="7"/>
-                                        </p:tgtEl>
-                                        <p:attrNameLst>
-                                          <p:attrName>style.visibility</p:attrName>
-                                        </p:attrNameLst>
-                                      </p:cBhvr>
-                                      <p:to>
-                                        <p:strVal val="visible"/>
-                                      </p:to>
-                                    </p:set>
-                                  </p:childTnLst>
-                                </p:cTn>
-                              </p:par>
-                            </p:childTnLst>
-                          </p:cTn>
-                        </p:par>
-                      </p:childTnLst>
-                    </p:cTn>
-                  </p:par>
                 </p:childTnLst>
               </p:cTn>
               <p:prevCondLst>
@@ -25520,13 +25905,12 @@
     </p:tnLst>
     <p:bldLst>
       <p:bldP spid="6" grpId="0"/>
-      <p:bldP spid="7" grpId="0"/>
     </p:bldLst>
   </p:timing>
 </p:sld>
 </file>
 
-<file path=ppt/slides/slide32.xml><?xml version="1.0" encoding="utf-8"?>
+<file path=ppt/slides/slide34.xml><?xml version="1.0" encoding="utf-8"?>
 <p:sld xmlns:a="http://schemas.openxmlformats.org/drawingml/2006/main" xmlns:r="http://schemas.openxmlformats.org/officeDocument/2006/relationships" xmlns:p="http://schemas.openxmlformats.org/presentationml/2006/main">
   <p:cSld>
     <p:spTree>
@@ -25959,7 +26343,7 @@
 </p:sld>
 </file>
 
-<file path=ppt/slides/slide33.xml><?xml version="1.0" encoding="utf-8"?>
+<file path=ppt/slides/slide35.xml><?xml version="1.0" encoding="utf-8"?>
 <p:sld xmlns:a="http://schemas.openxmlformats.org/drawingml/2006/main" xmlns:r="http://schemas.openxmlformats.org/officeDocument/2006/relationships" xmlns:p="http://schemas.openxmlformats.org/presentationml/2006/main">
   <p:cSld>
     <p:spTree>
@@ -26004,8 +26388,8 @@
           </a:p>
         </p:txBody>
       </p:sp>
-      <mc:AlternateContent xmlns:mc="http://schemas.openxmlformats.org/markup-compatibility/2006" xmlns:a14="http://schemas.microsoft.com/office/drawing/2010/main">
-        <mc:Choice Requires="a14">
+      <mc:AlternateContent xmlns:mc="http://schemas.openxmlformats.org/markup-compatibility/2006">
+        <mc:Choice xmlns:a14="http://schemas.microsoft.com/office/drawing/2010/main" Requires="a14">
           <p:sp>
             <p:nvSpPr>
               <p:cNvPr id="3" name="Content Placeholder 2">
@@ -26024,7 +26408,7 @@
             </p:nvSpPr>
             <p:spPr>
               <a:xfrm>
-                <a:off x="609600" y="1219200"/>
+                <a:off x="609600" y="1295400"/>
                 <a:ext cx="10972800" cy="3276600"/>
               </a:xfrm>
               <a:ln w="22225">
@@ -26475,7 +26859,7 @@
             </p:txBody>
           </p:sp>
         </mc:Choice>
-        <mc:Fallback xmlns="">
+        <mc:Fallback>
           <p:sp>
             <p:nvSpPr>
               <p:cNvPr id="3" name="Content Placeholder 2">
@@ -26494,13 +26878,13 @@
             </p:nvSpPr>
             <p:spPr>
               <a:xfrm>
-                <a:off x="609600" y="1219200"/>
+                <a:off x="609600" y="1295400"/>
                 <a:ext cx="10972800" cy="3276600"/>
               </a:xfrm>
               <a:blipFill>
                 <a:blip r:embed="rId2"/>
                 <a:stretch>
-                  <a:fillRect l="-721" t="-1107" b="-1292"/>
+                  <a:fillRect l="-721" t="-1109" b="-1294"/>
                 </a:stretch>
               </a:blipFill>
               <a:ln w="22225">
@@ -26537,7 +26921,7 @@
 </p:sld>
 </file>
 
-<file path=ppt/slides/slide34.xml><?xml version="1.0" encoding="utf-8"?>
+<file path=ppt/slides/slide36.xml><?xml version="1.0" encoding="utf-8"?>
 <p:sld xmlns:a="http://schemas.openxmlformats.org/drawingml/2006/main" xmlns:r="http://schemas.openxmlformats.org/officeDocument/2006/relationships" xmlns:p="http://schemas.openxmlformats.org/presentationml/2006/main">
   <p:cSld>
     <p:spTree>
@@ -26742,7 +27126,7 @@
 </p:sld>
 </file>
 
-<file path=ppt/slides/slide35.xml><?xml version="1.0" encoding="utf-8"?>
+<file path=ppt/slides/slide37.xml><?xml version="1.0" encoding="utf-8"?>
 <p:sld xmlns:a="http://schemas.openxmlformats.org/drawingml/2006/main" xmlns:r="http://schemas.openxmlformats.org/officeDocument/2006/relationships" xmlns:p="http://schemas.openxmlformats.org/presentationml/2006/main">
   <p:cSld>
     <p:spTree>
@@ -27318,7 +27702,7 @@
 </p:sld>
 </file>
 
-<file path=ppt/slides/slide36.xml><?xml version="1.0" encoding="utf-8"?>
+<file path=ppt/slides/slide38.xml><?xml version="1.0" encoding="utf-8"?>
 <p:sld xmlns:a="http://schemas.openxmlformats.org/drawingml/2006/main" xmlns:r="http://schemas.openxmlformats.org/officeDocument/2006/relationships" xmlns:p="http://schemas.openxmlformats.org/presentationml/2006/main">
   <p:cSld>
     <p:spTree>
@@ -28545,7 +28929,7 @@
 </p:sld>
 </file>
 
-<file path=ppt/slides/slide37.xml><?xml version="1.0" encoding="utf-8"?>
+<file path=ppt/slides/slide39.xml><?xml version="1.0" encoding="utf-8"?>
 <p:sld xmlns:a="http://schemas.openxmlformats.org/drawingml/2006/main" xmlns:r="http://schemas.openxmlformats.org/officeDocument/2006/relationships" xmlns:p="http://schemas.openxmlformats.org/presentationml/2006/main">
   <p:cSld>
     <p:spTree>
@@ -29713,7 +30097,479 @@
 </p:sld>
 </file>
 
-<file path=ppt/slides/slide38.xml><?xml version="1.0" encoding="utf-8"?>
+<file path=ppt/slides/slide4.xml><?xml version="1.0" encoding="utf-8"?>
+<p:sld xmlns:a="http://schemas.openxmlformats.org/drawingml/2006/main" xmlns:r="http://schemas.openxmlformats.org/officeDocument/2006/relationships" xmlns:p="http://schemas.openxmlformats.org/presentationml/2006/main">
+  <p:cSld>
+    <p:spTree>
+      <p:nvGrpSpPr>
+        <p:cNvPr id="1" name=""/>
+        <p:cNvGrpSpPr/>
+        <p:nvPr/>
+      </p:nvGrpSpPr>
+      <p:grpSpPr>
+        <a:xfrm>
+          <a:off x="0" y="0"/>
+          <a:ext cx="0" cy="0"/>
+          <a:chOff x="0" y="0"/>
+          <a:chExt cx="0" cy="0"/>
+        </a:xfrm>
+      </p:grpSpPr>
+      <p:sp>
+        <p:nvSpPr>
+          <p:cNvPr id="2" name="Title 1">
+            <a:extLst>
+              <a:ext uri="{FF2B5EF4-FFF2-40B4-BE49-F238E27FC236}">
+                <a16:creationId xmlns:a16="http://schemas.microsoft.com/office/drawing/2014/main" id="{36337409-8979-46BF-9B5D-A5D5E65B92AE}"/>
+              </a:ext>
+            </a:extLst>
+          </p:cNvPr>
+          <p:cNvSpPr>
+            <a:spLocks noGrp="1"/>
+          </p:cNvSpPr>
+          <p:nvPr>
+            <p:ph type="title"/>
+          </p:nvPr>
+        </p:nvSpPr>
+        <p:spPr/>
+        <p:txBody>
+          <a:bodyPr/>
+          <a:lstStyle/>
+          <a:p>
+            <a:endParaRPr lang="en-US" dirty="0"/>
+          </a:p>
+        </p:txBody>
+      </p:sp>
+      <mc:AlternateContent xmlns:mc="http://schemas.openxmlformats.org/markup-compatibility/2006" xmlns:a14="http://schemas.microsoft.com/office/drawing/2010/main">
+        <mc:Choice Requires="a14">
+          <p:sp>
+            <p:nvSpPr>
+              <p:cNvPr id="3" name="Content Placeholder 2">
+                <a:extLst>
+                  <a:ext uri="{FF2B5EF4-FFF2-40B4-BE49-F238E27FC236}">
+                    <a16:creationId xmlns:a16="http://schemas.microsoft.com/office/drawing/2014/main" id="{76E04ACD-2139-474B-8DD3-06B4AD87B957}"/>
+                  </a:ext>
+                </a:extLst>
+              </p:cNvPr>
+              <p:cNvSpPr>
+                <a:spLocks noGrp="1"/>
+              </p:cNvSpPr>
+              <p:nvPr>
+                <p:ph sz="quarter" idx="1"/>
+              </p:nvPr>
+            </p:nvSpPr>
+            <p:spPr/>
+            <p:txBody>
+              <a:bodyPr/>
+              <a:lstStyle/>
+              <a:p>
+                <a:r>
+                  <a:rPr lang="en-US" sz="2400" dirty="0"/>
+                  <a:t>Unweighted graph: </a:t>
+                </a:r>
+              </a:p>
+              <a:p>
+                <a:pPr lvl="1"/>
+                <a14:m>
+                  <m:oMath xmlns:m="http://schemas.openxmlformats.org/officeDocument/2006/math">
+                    <m:r>
+                      <a:rPr lang="en-US" sz="2000" i="1">
+                        <a:latin typeface="Cambria Math" panose="02040503050406030204" pitchFamily="18" charset="0"/>
+                      </a:rPr>
+                      <m:t>𝐺</m:t>
+                    </m:r>
+                    <m:r>
+                      <a:rPr lang="en-US" sz="2000" i="1">
+                        <a:latin typeface="Cambria Math" panose="02040503050406030204" pitchFamily="18" charset="0"/>
+                      </a:rPr>
+                      <m:t>=</m:t>
+                    </m:r>
+                    <m:d>
+                      <m:dPr>
+                        <m:ctrlPr>
+                          <a:rPr lang="en-US" sz="2000" i="1">
+                            <a:latin typeface="Cambria Math" panose="02040503050406030204" pitchFamily="18" charset="0"/>
+                          </a:rPr>
+                        </m:ctrlPr>
+                      </m:dPr>
+                      <m:e>
+                        <m:r>
+                          <a:rPr lang="en-US" sz="2000" i="1">
+                            <a:latin typeface="Cambria Math" panose="02040503050406030204" pitchFamily="18" charset="0"/>
+                          </a:rPr>
+                          <m:t>𝑉</m:t>
+                        </m:r>
+                        <m:r>
+                          <a:rPr lang="en-US" sz="2000" i="1">
+                            <a:latin typeface="Cambria Math" panose="02040503050406030204" pitchFamily="18" charset="0"/>
+                          </a:rPr>
+                          <m:t>, </m:t>
+                        </m:r>
+                        <m:r>
+                          <a:rPr lang="en-US" sz="2000" i="1">
+                            <a:latin typeface="Cambria Math" panose="02040503050406030204" pitchFamily="18" charset="0"/>
+                          </a:rPr>
+                          <m:t>𝐸</m:t>
+                        </m:r>
+                      </m:e>
+                    </m:d>
+                  </m:oMath>
+                </a14:m>
+                <a:endParaRPr lang="en-US" sz="2000" dirty="0"/>
+              </a:p>
+              <a:p>
+                <a:pPr lvl="1"/>
+                <a:endParaRPr lang="en-US" sz="800" dirty="0"/>
+              </a:p>
+              <a:p>
+                <a:r>
+                  <a:rPr lang="en-US" sz="2400" dirty="0"/>
+                  <a:t>Nodes and edges can carry meaning, and thus can carry weights as well. </a:t>
+                </a:r>
+              </a:p>
+              <a:p>
+                <a:endParaRPr lang="en-US" sz="800" dirty="0"/>
+              </a:p>
+              <a:p>
+                <a:r>
+                  <a:rPr lang="en-US" sz="2400" dirty="0"/>
+                  <a:t>Example:  transportation network </a:t>
+                </a:r>
+              </a:p>
+            </p:txBody>
+          </p:sp>
+        </mc:Choice>
+        <mc:Fallback xmlns="">
+          <p:sp>
+            <p:nvSpPr>
+              <p:cNvPr id="3" name="Content Placeholder 2">
+                <a:extLst>
+                  <a:ext uri="{FF2B5EF4-FFF2-40B4-BE49-F238E27FC236}">
+                    <a16:creationId xmlns:a16="http://schemas.microsoft.com/office/drawing/2014/main" id="{76E04ACD-2139-474B-8DD3-06B4AD87B957}"/>
+                  </a:ext>
+                </a:extLst>
+              </p:cNvPr>
+              <p:cNvSpPr>
+                <a:spLocks noGrp="1" noRot="1" noChangeAspect="1" noMove="1" noResize="1" noEditPoints="1" noAdjustHandles="1" noChangeArrowheads="1" noChangeShapeType="1" noTextEdit="1"/>
+              </p:cNvSpPr>
+              <p:nvPr>
+                <p:ph sz="quarter" idx="1"/>
+              </p:nvPr>
+            </p:nvSpPr>
+            <p:spPr>
+              <a:blipFill>
+                <a:blip r:embed="rId2"/>
+                <a:stretch>
+                  <a:fillRect l="-519" t="-988"/>
+                </a:stretch>
+              </a:blipFill>
+            </p:spPr>
+            <p:txBody>
+              <a:bodyPr/>
+              <a:lstStyle/>
+              <a:p>
+                <a:r>
+                  <a:rPr lang="en-US">
+                    <a:noFill/>
+                  </a:rPr>
+                  <a:t> </a:t>
+                </a:r>
+              </a:p>
+            </p:txBody>
+          </p:sp>
+        </mc:Fallback>
+      </mc:AlternateContent>
+      <p:pic>
+        <p:nvPicPr>
+          <p:cNvPr id="6" name="Picture 5">
+            <a:extLst>
+              <a:ext uri="{FF2B5EF4-FFF2-40B4-BE49-F238E27FC236}">
+                <a16:creationId xmlns:a16="http://schemas.microsoft.com/office/drawing/2014/main" id="{48931C66-5DFB-4B1B-8830-BFCE3255F407}"/>
+              </a:ext>
+            </a:extLst>
+          </p:cNvPr>
+          <p:cNvPicPr>
+            <a:picLocks noChangeAspect="1"/>
+          </p:cNvPicPr>
+          <p:nvPr/>
+        </p:nvPicPr>
+        <p:blipFill>
+          <a:blip r:embed="rId3"/>
+          <a:stretch>
+            <a:fillRect/>
+          </a:stretch>
+        </p:blipFill>
+        <p:spPr>
+          <a:xfrm>
+            <a:off x="2362200" y="3688080"/>
+            <a:ext cx="2836192" cy="2843212"/>
+          </a:xfrm>
+          <a:prstGeom prst="rect">
+            <a:avLst/>
+          </a:prstGeom>
+        </p:spPr>
+      </p:pic>
+      <p:pic>
+        <p:nvPicPr>
+          <p:cNvPr id="8" name="Picture 7">
+            <a:extLst>
+              <a:ext uri="{FF2B5EF4-FFF2-40B4-BE49-F238E27FC236}">
+                <a16:creationId xmlns:a16="http://schemas.microsoft.com/office/drawing/2014/main" id="{32DC6645-EED3-4F13-82DC-69FC057ED60F}"/>
+              </a:ext>
+            </a:extLst>
+          </p:cNvPr>
+          <p:cNvPicPr>
+            <a:picLocks noChangeAspect="1"/>
+          </p:cNvPicPr>
+          <p:nvPr/>
+        </p:nvPicPr>
+        <p:blipFill>
+          <a:blip r:embed="rId4"/>
+          <a:stretch>
+            <a:fillRect/>
+          </a:stretch>
+        </p:blipFill>
+        <p:spPr>
+          <a:xfrm>
+            <a:off x="6477000" y="3581400"/>
+            <a:ext cx="2905930" cy="2843212"/>
+          </a:xfrm>
+          <a:prstGeom prst="rect">
+            <a:avLst/>
+          </a:prstGeom>
+        </p:spPr>
+      </p:pic>
+    </p:spTree>
+    <p:extLst>
+      <p:ext uri="{BB962C8B-B14F-4D97-AF65-F5344CB8AC3E}">
+        <p14:creationId xmlns:p14="http://schemas.microsoft.com/office/powerpoint/2010/main" val="3166826222"/>
+      </p:ext>
+    </p:extLst>
+  </p:cSld>
+  <p:clrMapOvr>
+    <a:masterClrMapping/>
+  </p:clrMapOvr>
+  <p:timing>
+    <p:tnLst>
+      <p:par>
+        <p:cTn id="1" dur="indefinite" restart="never" nodeType="tmRoot">
+          <p:childTnLst>
+            <p:seq concurrent="1" nextAc="seek">
+              <p:cTn id="2" dur="indefinite" nodeType="mainSeq">
+                <p:childTnLst>
+                  <p:par>
+                    <p:cTn id="3" fill="hold">
+                      <p:stCondLst>
+                        <p:cond delay="indefinite"/>
+                      </p:stCondLst>
+                      <p:childTnLst>
+                        <p:par>
+                          <p:cTn id="4" fill="hold">
+                            <p:stCondLst>
+                              <p:cond delay="0"/>
+                            </p:stCondLst>
+                            <p:childTnLst>
+                              <p:par>
+                                <p:cTn id="5" presetID="1" presetClass="entr" presetSubtype="0" fill="hold" nodeType="clickEffect">
+                                  <p:stCondLst>
+                                    <p:cond delay="0"/>
+                                  </p:stCondLst>
+                                  <p:childTnLst>
+                                    <p:set>
+                                      <p:cBhvr>
+                                        <p:cTn id="6" dur="1" fill="hold">
+                                          <p:stCondLst>
+                                            <p:cond delay="0"/>
+                                          </p:stCondLst>
+                                        </p:cTn>
+                                        <p:tgtEl>
+                                          <p:spTgt spid="3">
+                                            <p:txEl>
+                                              <p:pRg st="3" end="3"/>
+                                            </p:txEl>
+                                          </p:spTgt>
+                                        </p:tgtEl>
+                                        <p:attrNameLst>
+                                          <p:attrName>style.visibility</p:attrName>
+                                        </p:attrNameLst>
+                                      </p:cBhvr>
+                                      <p:to>
+                                        <p:strVal val="visible"/>
+                                      </p:to>
+                                    </p:set>
+                                  </p:childTnLst>
+                                </p:cTn>
+                              </p:par>
+                            </p:childTnLst>
+                          </p:cTn>
+                        </p:par>
+                      </p:childTnLst>
+                    </p:cTn>
+                  </p:par>
+                  <p:par>
+                    <p:cTn id="7" fill="hold">
+                      <p:stCondLst>
+                        <p:cond delay="indefinite"/>
+                      </p:stCondLst>
+                      <p:childTnLst>
+                        <p:par>
+                          <p:cTn id="8" fill="hold">
+                            <p:stCondLst>
+                              <p:cond delay="0"/>
+                            </p:stCondLst>
+                            <p:childTnLst>
+                              <p:par>
+                                <p:cTn id="9" presetID="1" presetClass="entr" presetSubtype="0" fill="hold" nodeType="clickEffect">
+                                  <p:stCondLst>
+                                    <p:cond delay="0"/>
+                                  </p:stCondLst>
+                                  <p:childTnLst>
+                                    <p:set>
+                                      <p:cBhvr>
+                                        <p:cTn id="10" dur="1" fill="hold">
+                                          <p:stCondLst>
+                                            <p:cond delay="0"/>
+                                          </p:stCondLst>
+                                        </p:cTn>
+                                        <p:tgtEl>
+                                          <p:spTgt spid="3">
+                                            <p:txEl>
+                                              <p:pRg st="5" end="5"/>
+                                            </p:txEl>
+                                          </p:spTgt>
+                                        </p:tgtEl>
+                                        <p:attrNameLst>
+                                          <p:attrName>style.visibility</p:attrName>
+                                        </p:attrNameLst>
+                                      </p:cBhvr>
+                                      <p:to>
+                                        <p:strVal val="visible"/>
+                                      </p:to>
+                                    </p:set>
+                                  </p:childTnLst>
+                                </p:cTn>
+                              </p:par>
+                            </p:childTnLst>
+                          </p:cTn>
+                        </p:par>
+                      </p:childTnLst>
+                    </p:cTn>
+                  </p:par>
+                  <p:par>
+                    <p:cTn id="11" fill="hold">
+                      <p:stCondLst>
+                        <p:cond delay="indefinite"/>
+                      </p:stCondLst>
+                      <p:childTnLst>
+                        <p:par>
+                          <p:cTn id="12" fill="hold">
+                            <p:stCondLst>
+                              <p:cond delay="0"/>
+                            </p:stCondLst>
+                            <p:childTnLst>
+                              <p:par>
+                                <p:cTn id="13" presetID="1" presetClass="entr" presetSubtype="0" fill="hold" nodeType="clickEffect">
+                                  <p:stCondLst>
+                                    <p:cond delay="0"/>
+                                  </p:stCondLst>
+                                  <p:childTnLst>
+                                    <p:set>
+                                      <p:cBhvr>
+                                        <p:cTn id="14" dur="1" fill="hold">
+                                          <p:stCondLst>
+                                            <p:cond delay="0"/>
+                                          </p:stCondLst>
+                                        </p:cTn>
+                                        <p:tgtEl>
+                                          <p:spTgt spid="6"/>
+                                        </p:tgtEl>
+                                        <p:attrNameLst>
+                                          <p:attrName>style.visibility</p:attrName>
+                                        </p:attrNameLst>
+                                      </p:cBhvr>
+                                      <p:to>
+                                        <p:strVal val="visible"/>
+                                      </p:to>
+                                    </p:set>
+                                  </p:childTnLst>
+                                </p:cTn>
+                              </p:par>
+                            </p:childTnLst>
+                          </p:cTn>
+                        </p:par>
+                      </p:childTnLst>
+                    </p:cTn>
+                  </p:par>
+                  <p:par>
+                    <p:cTn id="15" fill="hold">
+                      <p:stCondLst>
+                        <p:cond delay="indefinite"/>
+                      </p:stCondLst>
+                      <p:childTnLst>
+                        <p:par>
+                          <p:cTn id="16" fill="hold">
+                            <p:stCondLst>
+                              <p:cond delay="0"/>
+                            </p:stCondLst>
+                            <p:childTnLst>
+                              <p:par>
+                                <p:cTn id="17" presetID="1" presetClass="entr" presetSubtype="0" fill="hold" nodeType="clickEffect">
+                                  <p:stCondLst>
+                                    <p:cond delay="0"/>
+                                  </p:stCondLst>
+                                  <p:childTnLst>
+                                    <p:set>
+                                      <p:cBhvr>
+                                        <p:cTn id="18" dur="1" fill="hold">
+                                          <p:stCondLst>
+                                            <p:cond delay="0"/>
+                                          </p:stCondLst>
+                                        </p:cTn>
+                                        <p:tgtEl>
+                                          <p:spTgt spid="8"/>
+                                        </p:tgtEl>
+                                        <p:attrNameLst>
+                                          <p:attrName>style.visibility</p:attrName>
+                                        </p:attrNameLst>
+                                      </p:cBhvr>
+                                      <p:to>
+                                        <p:strVal val="visible"/>
+                                      </p:to>
+                                    </p:set>
+                                  </p:childTnLst>
+                                </p:cTn>
+                              </p:par>
+                            </p:childTnLst>
+                          </p:cTn>
+                        </p:par>
+                      </p:childTnLst>
+                    </p:cTn>
+                  </p:par>
+                </p:childTnLst>
+              </p:cTn>
+              <p:prevCondLst>
+                <p:cond evt="onPrev" delay="0">
+                  <p:tgtEl>
+                    <p:sldTgt/>
+                  </p:tgtEl>
+                </p:cond>
+              </p:prevCondLst>
+              <p:nextCondLst>
+                <p:cond evt="onNext" delay="0">
+                  <p:tgtEl>
+                    <p:sldTgt/>
+                  </p:tgtEl>
+                </p:cond>
+              </p:nextCondLst>
+            </p:seq>
+          </p:childTnLst>
+        </p:cTn>
+      </p:par>
+    </p:tnLst>
+  </p:timing>
+</p:sld>
+</file>
+
+<file path=ppt/slides/slide40.xml><?xml version="1.0" encoding="utf-8"?>
 <p:sld xmlns:a="http://schemas.openxmlformats.org/drawingml/2006/main" xmlns:r="http://schemas.openxmlformats.org/officeDocument/2006/relationships" xmlns:p="http://schemas.openxmlformats.org/presentationml/2006/main">
   <p:cSld>
     <p:spTree>
@@ -30892,7 +31748,7 @@
 </p:sld>
 </file>
 
-<file path=ppt/slides/slide39.xml><?xml version="1.0" encoding="utf-8"?>
+<file path=ppt/slides/slide41.xml><?xml version="1.0" encoding="utf-8"?>
 <p:sld xmlns:a="http://schemas.openxmlformats.org/drawingml/2006/main" xmlns:r="http://schemas.openxmlformats.org/officeDocument/2006/relationships" xmlns:p="http://schemas.openxmlformats.org/presentationml/2006/main">
   <p:cSld>
     <p:spTree>
@@ -32071,479 +32927,7 @@
 </p:sld>
 </file>
 
-<file path=ppt/slides/slide4.xml><?xml version="1.0" encoding="utf-8"?>
-<p:sld xmlns:a="http://schemas.openxmlformats.org/drawingml/2006/main" xmlns:r="http://schemas.openxmlformats.org/officeDocument/2006/relationships" xmlns:p="http://schemas.openxmlformats.org/presentationml/2006/main">
-  <p:cSld>
-    <p:spTree>
-      <p:nvGrpSpPr>
-        <p:cNvPr id="1" name=""/>
-        <p:cNvGrpSpPr/>
-        <p:nvPr/>
-      </p:nvGrpSpPr>
-      <p:grpSpPr>
-        <a:xfrm>
-          <a:off x="0" y="0"/>
-          <a:ext cx="0" cy="0"/>
-          <a:chOff x="0" y="0"/>
-          <a:chExt cx="0" cy="0"/>
-        </a:xfrm>
-      </p:grpSpPr>
-      <p:sp>
-        <p:nvSpPr>
-          <p:cNvPr id="2" name="Title 1">
-            <a:extLst>
-              <a:ext uri="{FF2B5EF4-FFF2-40B4-BE49-F238E27FC236}">
-                <a16:creationId xmlns:a16="http://schemas.microsoft.com/office/drawing/2014/main" id="{36337409-8979-46BF-9B5D-A5D5E65B92AE}"/>
-              </a:ext>
-            </a:extLst>
-          </p:cNvPr>
-          <p:cNvSpPr>
-            <a:spLocks noGrp="1"/>
-          </p:cNvSpPr>
-          <p:nvPr>
-            <p:ph type="title"/>
-          </p:nvPr>
-        </p:nvSpPr>
-        <p:spPr/>
-        <p:txBody>
-          <a:bodyPr/>
-          <a:lstStyle/>
-          <a:p>
-            <a:endParaRPr lang="en-US" dirty="0"/>
-          </a:p>
-        </p:txBody>
-      </p:sp>
-      <mc:AlternateContent xmlns:mc="http://schemas.openxmlformats.org/markup-compatibility/2006" xmlns:a14="http://schemas.microsoft.com/office/drawing/2010/main">
-        <mc:Choice Requires="a14">
-          <p:sp>
-            <p:nvSpPr>
-              <p:cNvPr id="3" name="Content Placeholder 2">
-                <a:extLst>
-                  <a:ext uri="{FF2B5EF4-FFF2-40B4-BE49-F238E27FC236}">
-                    <a16:creationId xmlns:a16="http://schemas.microsoft.com/office/drawing/2014/main" id="{76E04ACD-2139-474B-8DD3-06B4AD87B957}"/>
-                  </a:ext>
-                </a:extLst>
-              </p:cNvPr>
-              <p:cNvSpPr>
-                <a:spLocks noGrp="1"/>
-              </p:cNvSpPr>
-              <p:nvPr>
-                <p:ph sz="quarter" idx="1"/>
-              </p:nvPr>
-            </p:nvSpPr>
-            <p:spPr/>
-            <p:txBody>
-              <a:bodyPr/>
-              <a:lstStyle/>
-              <a:p>
-                <a:r>
-                  <a:rPr lang="en-US" sz="2400" dirty="0"/>
-                  <a:t>Unweighted graph: </a:t>
-                </a:r>
-              </a:p>
-              <a:p>
-                <a:pPr lvl="1"/>
-                <a14:m>
-                  <m:oMath xmlns:m="http://schemas.openxmlformats.org/officeDocument/2006/math">
-                    <m:r>
-                      <a:rPr lang="en-US" sz="2000" i="1">
-                        <a:latin typeface="Cambria Math" panose="02040503050406030204" pitchFamily="18" charset="0"/>
-                      </a:rPr>
-                      <m:t>𝐺</m:t>
-                    </m:r>
-                    <m:r>
-                      <a:rPr lang="en-US" sz="2000" i="1">
-                        <a:latin typeface="Cambria Math" panose="02040503050406030204" pitchFamily="18" charset="0"/>
-                      </a:rPr>
-                      <m:t>=</m:t>
-                    </m:r>
-                    <m:d>
-                      <m:dPr>
-                        <m:ctrlPr>
-                          <a:rPr lang="en-US" sz="2000" i="1">
-                            <a:latin typeface="Cambria Math" panose="02040503050406030204" pitchFamily="18" charset="0"/>
-                          </a:rPr>
-                        </m:ctrlPr>
-                      </m:dPr>
-                      <m:e>
-                        <m:r>
-                          <a:rPr lang="en-US" sz="2000" i="1">
-                            <a:latin typeface="Cambria Math" panose="02040503050406030204" pitchFamily="18" charset="0"/>
-                          </a:rPr>
-                          <m:t>𝑉</m:t>
-                        </m:r>
-                        <m:r>
-                          <a:rPr lang="en-US" sz="2000" i="1">
-                            <a:latin typeface="Cambria Math" panose="02040503050406030204" pitchFamily="18" charset="0"/>
-                          </a:rPr>
-                          <m:t>, </m:t>
-                        </m:r>
-                        <m:r>
-                          <a:rPr lang="en-US" sz="2000" i="1">
-                            <a:latin typeface="Cambria Math" panose="02040503050406030204" pitchFamily="18" charset="0"/>
-                          </a:rPr>
-                          <m:t>𝐸</m:t>
-                        </m:r>
-                      </m:e>
-                    </m:d>
-                  </m:oMath>
-                </a14:m>
-                <a:endParaRPr lang="en-US" sz="2000" dirty="0"/>
-              </a:p>
-              <a:p>
-                <a:pPr lvl="1"/>
-                <a:endParaRPr lang="en-US" sz="800" dirty="0"/>
-              </a:p>
-              <a:p>
-                <a:r>
-                  <a:rPr lang="en-US" sz="2400" dirty="0"/>
-                  <a:t>Nodes and edges can carry meaning, and thus can carry weights as well. </a:t>
-                </a:r>
-              </a:p>
-              <a:p>
-                <a:endParaRPr lang="en-US" sz="800" dirty="0"/>
-              </a:p>
-              <a:p>
-                <a:r>
-                  <a:rPr lang="en-US" sz="2400" dirty="0"/>
-                  <a:t>Example:  transportation network </a:t>
-                </a:r>
-              </a:p>
-            </p:txBody>
-          </p:sp>
-        </mc:Choice>
-        <mc:Fallback xmlns="">
-          <p:sp>
-            <p:nvSpPr>
-              <p:cNvPr id="3" name="Content Placeholder 2">
-                <a:extLst>
-                  <a:ext uri="{FF2B5EF4-FFF2-40B4-BE49-F238E27FC236}">
-                    <a16:creationId xmlns:a16="http://schemas.microsoft.com/office/drawing/2014/main" id="{76E04ACD-2139-474B-8DD3-06B4AD87B957}"/>
-                  </a:ext>
-                </a:extLst>
-              </p:cNvPr>
-              <p:cNvSpPr>
-                <a:spLocks noGrp="1" noRot="1" noChangeAspect="1" noMove="1" noResize="1" noEditPoints="1" noAdjustHandles="1" noChangeArrowheads="1" noChangeShapeType="1" noTextEdit="1"/>
-              </p:cNvSpPr>
-              <p:nvPr>
-                <p:ph sz="quarter" idx="1"/>
-              </p:nvPr>
-            </p:nvSpPr>
-            <p:spPr>
-              <a:blipFill>
-                <a:blip r:embed="rId2"/>
-                <a:stretch>
-                  <a:fillRect l="-519" t="-988"/>
-                </a:stretch>
-              </a:blipFill>
-            </p:spPr>
-            <p:txBody>
-              <a:bodyPr/>
-              <a:lstStyle/>
-              <a:p>
-                <a:r>
-                  <a:rPr lang="en-US">
-                    <a:noFill/>
-                  </a:rPr>
-                  <a:t> </a:t>
-                </a:r>
-              </a:p>
-            </p:txBody>
-          </p:sp>
-        </mc:Fallback>
-      </mc:AlternateContent>
-      <p:pic>
-        <p:nvPicPr>
-          <p:cNvPr id="6" name="Picture 5">
-            <a:extLst>
-              <a:ext uri="{FF2B5EF4-FFF2-40B4-BE49-F238E27FC236}">
-                <a16:creationId xmlns:a16="http://schemas.microsoft.com/office/drawing/2014/main" id="{48931C66-5DFB-4B1B-8830-BFCE3255F407}"/>
-              </a:ext>
-            </a:extLst>
-          </p:cNvPr>
-          <p:cNvPicPr>
-            <a:picLocks noChangeAspect="1"/>
-          </p:cNvPicPr>
-          <p:nvPr/>
-        </p:nvPicPr>
-        <p:blipFill>
-          <a:blip r:embed="rId3"/>
-          <a:stretch>
-            <a:fillRect/>
-          </a:stretch>
-        </p:blipFill>
-        <p:spPr>
-          <a:xfrm>
-            <a:off x="2362200" y="3688080"/>
-            <a:ext cx="2836192" cy="2843212"/>
-          </a:xfrm>
-          <a:prstGeom prst="rect">
-            <a:avLst/>
-          </a:prstGeom>
-        </p:spPr>
-      </p:pic>
-      <p:pic>
-        <p:nvPicPr>
-          <p:cNvPr id="8" name="Picture 7">
-            <a:extLst>
-              <a:ext uri="{FF2B5EF4-FFF2-40B4-BE49-F238E27FC236}">
-                <a16:creationId xmlns:a16="http://schemas.microsoft.com/office/drawing/2014/main" id="{32DC6645-EED3-4F13-82DC-69FC057ED60F}"/>
-              </a:ext>
-            </a:extLst>
-          </p:cNvPr>
-          <p:cNvPicPr>
-            <a:picLocks noChangeAspect="1"/>
-          </p:cNvPicPr>
-          <p:nvPr/>
-        </p:nvPicPr>
-        <p:blipFill>
-          <a:blip r:embed="rId4"/>
-          <a:stretch>
-            <a:fillRect/>
-          </a:stretch>
-        </p:blipFill>
-        <p:spPr>
-          <a:xfrm>
-            <a:off x="6477000" y="3581400"/>
-            <a:ext cx="2905930" cy="2843212"/>
-          </a:xfrm>
-          <a:prstGeom prst="rect">
-            <a:avLst/>
-          </a:prstGeom>
-        </p:spPr>
-      </p:pic>
-    </p:spTree>
-    <p:extLst>
-      <p:ext uri="{BB962C8B-B14F-4D97-AF65-F5344CB8AC3E}">
-        <p14:creationId xmlns:p14="http://schemas.microsoft.com/office/powerpoint/2010/main" val="3166826222"/>
-      </p:ext>
-    </p:extLst>
-  </p:cSld>
-  <p:clrMapOvr>
-    <a:masterClrMapping/>
-  </p:clrMapOvr>
-  <p:timing>
-    <p:tnLst>
-      <p:par>
-        <p:cTn id="1" dur="indefinite" restart="never" nodeType="tmRoot">
-          <p:childTnLst>
-            <p:seq concurrent="1" nextAc="seek">
-              <p:cTn id="2" dur="indefinite" nodeType="mainSeq">
-                <p:childTnLst>
-                  <p:par>
-                    <p:cTn id="3" fill="hold">
-                      <p:stCondLst>
-                        <p:cond delay="indefinite"/>
-                      </p:stCondLst>
-                      <p:childTnLst>
-                        <p:par>
-                          <p:cTn id="4" fill="hold">
-                            <p:stCondLst>
-                              <p:cond delay="0"/>
-                            </p:stCondLst>
-                            <p:childTnLst>
-                              <p:par>
-                                <p:cTn id="5" presetID="1" presetClass="entr" presetSubtype="0" fill="hold" nodeType="clickEffect">
-                                  <p:stCondLst>
-                                    <p:cond delay="0"/>
-                                  </p:stCondLst>
-                                  <p:childTnLst>
-                                    <p:set>
-                                      <p:cBhvr>
-                                        <p:cTn id="6" dur="1" fill="hold">
-                                          <p:stCondLst>
-                                            <p:cond delay="0"/>
-                                          </p:stCondLst>
-                                        </p:cTn>
-                                        <p:tgtEl>
-                                          <p:spTgt spid="3">
-                                            <p:txEl>
-                                              <p:pRg st="3" end="3"/>
-                                            </p:txEl>
-                                          </p:spTgt>
-                                        </p:tgtEl>
-                                        <p:attrNameLst>
-                                          <p:attrName>style.visibility</p:attrName>
-                                        </p:attrNameLst>
-                                      </p:cBhvr>
-                                      <p:to>
-                                        <p:strVal val="visible"/>
-                                      </p:to>
-                                    </p:set>
-                                  </p:childTnLst>
-                                </p:cTn>
-                              </p:par>
-                            </p:childTnLst>
-                          </p:cTn>
-                        </p:par>
-                      </p:childTnLst>
-                    </p:cTn>
-                  </p:par>
-                  <p:par>
-                    <p:cTn id="7" fill="hold">
-                      <p:stCondLst>
-                        <p:cond delay="indefinite"/>
-                      </p:stCondLst>
-                      <p:childTnLst>
-                        <p:par>
-                          <p:cTn id="8" fill="hold">
-                            <p:stCondLst>
-                              <p:cond delay="0"/>
-                            </p:stCondLst>
-                            <p:childTnLst>
-                              <p:par>
-                                <p:cTn id="9" presetID="1" presetClass="entr" presetSubtype="0" fill="hold" nodeType="clickEffect">
-                                  <p:stCondLst>
-                                    <p:cond delay="0"/>
-                                  </p:stCondLst>
-                                  <p:childTnLst>
-                                    <p:set>
-                                      <p:cBhvr>
-                                        <p:cTn id="10" dur="1" fill="hold">
-                                          <p:stCondLst>
-                                            <p:cond delay="0"/>
-                                          </p:stCondLst>
-                                        </p:cTn>
-                                        <p:tgtEl>
-                                          <p:spTgt spid="3">
-                                            <p:txEl>
-                                              <p:pRg st="5" end="5"/>
-                                            </p:txEl>
-                                          </p:spTgt>
-                                        </p:tgtEl>
-                                        <p:attrNameLst>
-                                          <p:attrName>style.visibility</p:attrName>
-                                        </p:attrNameLst>
-                                      </p:cBhvr>
-                                      <p:to>
-                                        <p:strVal val="visible"/>
-                                      </p:to>
-                                    </p:set>
-                                  </p:childTnLst>
-                                </p:cTn>
-                              </p:par>
-                            </p:childTnLst>
-                          </p:cTn>
-                        </p:par>
-                      </p:childTnLst>
-                    </p:cTn>
-                  </p:par>
-                  <p:par>
-                    <p:cTn id="11" fill="hold">
-                      <p:stCondLst>
-                        <p:cond delay="indefinite"/>
-                      </p:stCondLst>
-                      <p:childTnLst>
-                        <p:par>
-                          <p:cTn id="12" fill="hold">
-                            <p:stCondLst>
-                              <p:cond delay="0"/>
-                            </p:stCondLst>
-                            <p:childTnLst>
-                              <p:par>
-                                <p:cTn id="13" presetID="1" presetClass="entr" presetSubtype="0" fill="hold" nodeType="clickEffect">
-                                  <p:stCondLst>
-                                    <p:cond delay="0"/>
-                                  </p:stCondLst>
-                                  <p:childTnLst>
-                                    <p:set>
-                                      <p:cBhvr>
-                                        <p:cTn id="14" dur="1" fill="hold">
-                                          <p:stCondLst>
-                                            <p:cond delay="0"/>
-                                          </p:stCondLst>
-                                        </p:cTn>
-                                        <p:tgtEl>
-                                          <p:spTgt spid="6"/>
-                                        </p:tgtEl>
-                                        <p:attrNameLst>
-                                          <p:attrName>style.visibility</p:attrName>
-                                        </p:attrNameLst>
-                                      </p:cBhvr>
-                                      <p:to>
-                                        <p:strVal val="visible"/>
-                                      </p:to>
-                                    </p:set>
-                                  </p:childTnLst>
-                                </p:cTn>
-                              </p:par>
-                            </p:childTnLst>
-                          </p:cTn>
-                        </p:par>
-                      </p:childTnLst>
-                    </p:cTn>
-                  </p:par>
-                  <p:par>
-                    <p:cTn id="15" fill="hold">
-                      <p:stCondLst>
-                        <p:cond delay="indefinite"/>
-                      </p:stCondLst>
-                      <p:childTnLst>
-                        <p:par>
-                          <p:cTn id="16" fill="hold">
-                            <p:stCondLst>
-                              <p:cond delay="0"/>
-                            </p:stCondLst>
-                            <p:childTnLst>
-                              <p:par>
-                                <p:cTn id="17" presetID="1" presetClass="entr" presetSubtype="0" fill="hold" nodeType="clickEffect">
-                                  <p:stCondLst>
-                                    <p:cond delay="0"/>
-                                  </p:stCondLst>
-                                  <p:childTnLst>
-                                    <p:set>
-                                      <p:cBhvr>
-                                        <p:cTn id="18" dur="1" fill="hold">
-                                          <p:stCondLst>
-                                            <p:cond delay="0"/>
-                                          </p:stCondLst>
-                                        </p:cTn>
-                                        <p:tgtEl>
-                                          <p:spTgt spid="8"/>
-                                        </p:tgtEl>
-                                        <p:attrNameLst>
-                                          <p:attrName>style.visibility</p:attrName>
-                                        </p:attrNameLst>
-                                      </p:cBhvr>
-                                      <p:to>
-                                        <p:strVal val="visible"/>
-                                      </p:to>
-                                    </p:set>
-                                  </p:childTnLst>
-                                </p:cTn>
-                              </p:par>
-                            </p:childTnLst>
-                          </p:cTn>
-                        </p:par>
-                      </p:childTnLst>
-                    </p:cTn>
-                  </p:par>
-                </p:childTnLst>
-              </p:cTn>
-              <p:prevCondLst>
-                <p:cond evt="onPrev" delay="0">
-                  <p:tgtEl>
-                    <p:sldTgt/>
-                  </p:tgtEl>
-                </p:cond>
-              </p:prevCondLst>
-              <p:nextCondLst>
-                <p:cond evt="onNext" delay="0">
-                  <p:tgtEl>
-                    <p:sldTgt/>
-                  </p:tgtEl>
-                </p:cond>
-              </p:nextCondLst>
-            </p:seq>
-          </p:childTnLst>
-        </p:cTn>
-      </p:par>
-    </p:tnLst>
-  </p:timing>
-</p:sld>
-</file>
-
-<file path=ppt/slides/slide40.xml><?xml version="1.0" encoding="utf-8"?>
+<file path=ppt/slides/slide42.xml><?xml version="1.0" encoding="utf-8"?>
 <p:sld xmlns:a="http://schemas.openxmlformats.org/drawingml/2006/main" xmlns:r="http://schemas.openxmlformats.org/officeDocument/2006/relationships" xmlns:p="http://schemas.openxmlformats.org/presentationml/2006/main">
   <p:cSld>
     <p:spTree>
@@ -32860,7 +33244,7 @@
 </p:sld>
 </file>
 
-<file path=ppt/slides/slide41.xml><?xml version="1.0" encoding="utf-8"?>
+<file path=ppt/slides/slide43.xml><?xml version="1.0" encoding="utf-8"?>
 <p:sld xmlns:a="http://schemas.openxmlformats.org/drawingml/2006/main" xmlns:r="http://schemas.openxmlformats.org/officeDocument/2006/relationships" xmlns:p="http://schemas.openxmlformats.org/presentationml/2006/main">
   <p:cSld>
     <p:spTree>
@@ -33400,7 +33784,7 @@
 </p:sld>
 </file>
 
-<file path=ppt/slides/slide42.xml><?xml version="1.0" encoding="utf-8"?>
+<file path=ppt/slides/slide44.xml><?xml version="1.0" encoding="utf-8"?>
 <p:sld xmlns:a="http://schemas.openxmlformats.org/drawingml/2006/main" xmlns:r="http://schemas.openxmlformats.org/officeDocument/2006/relationships" xmlns:p="http://schemas.openxmlformats.org/presentationml/2006/main">
   <p:cSld>
     <p:spTree>
@@ -33544,7 +33928,7 @@
 </p:sld>
 </file>
 
-<file path=ppt/slides/slide43.xml><?xml version="1.0" encoding="utf-8"?>
+<file path=ppt/slides/slide45.xml><?xml version="1.0" encoding="utf-8"?>
 <p:sld xmlns:a="http://schemas.openxmlformats.org/drawingml/2006/main" xmlns:r="http://schemas.openxmlformats.org/officeDocument/2006/relationships" xmlns:p="http://schemas.openxmlformats.org/presentationml/2006/main">
   <p:cSld>
     <p:spTree>
@@ -34213,7 +34597,7 @@
 </p:sld>
 </file>
 
-<file path=ppt/slides/slide44.xml><?xml version="1.0" encoding="utf-8"?>
+<file path=ppt/slides/slide46.xml><?xml version="1.0" encoding="utf-8"?>
 <p:sld xmlns:a="http://schemas.openxmlformats.org/drawingml/2006/main" xmlns:r="http://schemas.openxmlformats.org/officeDocument/2006/relationships" xmlns:p="http://schemas.openxmlformats.org/presentationml/2006/main">
   <p:cSld>
     <p:spTree>
@@ -35007,7 +35391,7 @@
 </p:sld>
 </file>
 
-<file path=ppt/slides/slide45.xml><?xml version="1.0" encoding="utf-8"?>
+<file path=ppt/slides/slide47.xml><?xml version="1.0" encoding="utf-8"?>
 <p:sld xmlns:a="http://schemas.openxmlformats.org/drawingml/2006/main" xmlns:r="http://schemas.openxmlformats.org/officeDocument/2006/relationships" xmlns:p="http://schemas.openxmlformats.org/presentationml/2006/main">
   <p:cSld>
     <p:spTree>
@@ -35212,7 +35596,7 @@
 </p:sld>
 </file>
 
-<file path=ppt/slides/slide46.xml><?xml version="1.0" encoding="utf-8"?>
+<file path=ppt/slides/slide48.xml><?xml version="1.0" encoding="utf-8"?>
 <p:sld xmlns:a="http://schemas.openxmlformats.org/drawingml/2006/main" xmlns:r="http://schemas.openxmlformats.org/officeDocument/2006/relationships" xmlns:p="http://schemas.openxmlformats.org/presentationml/2006/main">
   <p:cSld>
     <p:spTree>
@@ -35414,7 +35798,7 @@
 </p:sld>
 </file>
 
-<file path=ppt/slides/slide47.xml><?xml version="1.0" encoding="utf-8"?>
+<file path=ppt/slides/slide49.xml><?xml version="1.0" encoding="utf-8"?>
 <p:sld xmlns:a="http://schemas.openxmlformats.org/drawingml/2006/main" xmlns:r="http://schemas.openxmlformats.org/officeDocument/2006/relationships" xmlns:p="http://schemas.openxmlformats.org/presentationml/2006/main">
   <p:cSld>
     <p:spTree>
@@ -35524,490 +35908,6 @@
     <p:extLst>
       <p:ext uri="{BB962C8B-B14F-4D97-AF65-F5344CB8AC3E}">
         <p14:creationId xmlns:p14="http://schemas.microsoft.com/office/powerpoint/2010/main" val="2569718510"/>
-      </p:ext>
-    </p:extLst>
-  </p:cSld>
-  <p:clrMapOvr>
-    <a:masterClrMapping/>
-  </p:clrMapOvr>
-</p:sld>
-</file>
-
-<file path=ppt/slides/slide48.xml><?xml version="1.0" encoding="utf-8"?>
-<p:sld xmlns:a="http://schemas.openxmlformats.org/drawingml/2006/main" xmlns:r="http://schemas.openxmlformats.org/officeDocument/2006/relationships" xmlns:p="http://schemas.openxmlformats.org/presentationml/2006/main">
-  <p:cSld>
-    <p:spTree>
-      <p:nvGrpSpPr>
-        <p:cNvPr id="1" name=""/>
-        <p:cNvGrpSpPr/>
-        <p:nvPr/>
-      </p:nvGrpSpPr>
-      <p:grpSpPr>
-        <a:xfrm>
-          <a:off x="0" y="0"/>
-          <a:ext cx="0" cy="0"/>
-          <a:chOff x="0" y="0"/>
-          <a:chExt cx="0" cy="0"/>
-        </a:xfrm>
-      </p:grpSpPr>
-      <p:sp>
-        <p:nvSpPr>
-          <p:cNvPr id="2" name="Title 1">
-            <a:extLst>
-              <a:ext uri="{FF2B5EF4-FFF2-40B4-BE49-F238E27FC236}">
-                <a16:creationId xmlns:a16="http://schemas.microsoft.com/office/drawing/2014/main" id="{C73D0361-5842-4BCC-98B3-49F7413F7E03}"/>
-              </a:ext>
-            </a:extLst>
-          </p:cNvPr>
-          <p:cNvSpPr>
-            <a:spLocks noGrp="1"/>
-          </p:cNvSpPr>
-          <p:nvPr>
-            <p:ph type="title"/>
-          </p:nvPr>
-        </p:nvSpPr>
-        <p:spPr/>
-        <p:txBody>
-          <a:bodyPr/>
-          <a:lstStyle/>
-          <a:p>
-            <a:r>
-              <a:rPr lang="en-US" dirty="0"/>
-              <a:t>Negative Cycles </a:t>
-            </a:r>
-          </a:p>
-        </p:txBody>
-      </p:sp>
-      <mc:AlternateContent xmlns:mc="http://schemas.openxmlformats.org/markup-compatibility/2006" xmlns:a14="http://schemas.microsoft.com/office/drawing/2010/main">
-        <mc:Choice Requires="a14">
-          <p:sp>
-            <p:nvSpPr>
-              <p:cNvPr id="3" name="Content Placeholder 2">
-                <a:extLst>
-                  <a:ext uri="{FF2B5EF4-FFF2-40B4-BE49-F238E27FC236}">
-                    <a16:creationId xmlns:a16="http://schemas.microsoft.com/office/drawing/2014/main" id="{354B81FA-4F37-487A-A741-271225E843B8}"/>
-                  </a:ext>
-                </a:extLst>
-              </p:cNvPr>
-              <p:cNvSpPr>
-                <a:spLocks noGrp="1"/>
-              </p:cNvSpPr>
-              <p:nvPr>
-                <p:ph sz="quarter" idx="1"/>
-              </p:nvPr>
-            </p:nvSpPr>
-            <p:spPr/>
-            <p:txBody>
-              <a:bodyPr/>
-              <a:lstStyle/>
-              <a:p>
-                <a:r>
-                  <a:rPr lang="en-US" dirty="0"/>
-                  <a:t>Recall: if a graph has negative cycle(s), then the shortest paths are not well-defined</a:t>
-                </a:r>
-              </a:p>
-              <a:p>
-                <a:endParaRPr lang="en-US" dirty="0"/>
-              </a:p>
-              <a:p>
-                <a:r>
-                  <a:rPr lang="en-US" dirty="0"/>
-                  <a:t>If a graph does not have any negative cycle, then the estimated distances </a:t>
-                </a:r>
-                <a:r>
-                  <a:rPr lang="en-US" dirty="0">
-                    <a:solidFill>
-                      <a:srgbClr val="00B050"/>
-                    </a:solidFill>
-                  </a:rPr>
-                  <a:t>stop changing </a:t>
-                </a:r>
-                <a:r>
-                  <a:rPr lang="en-US" dirty="0"/>
-                  <a:t>after </a:t>
-                </a:r>
-                <a14:m>
-                  <m:oMath xmlns:m="http://schemas.openxmlformats.org/officeDocument/2006/math">
-                    <m:r>
-                      <a:rPr lang="en-US" b="0" i="1" smtClean="0">
-                        <a:latin typeface="Cambria Math" panose="02040503050406030204" pitchFamily="18" charset="0"/>
-                      </a:rPr>
-                      <m:t>𝑉</m:t>
-                    </m:r>
-                    <m:r>
-                      <a:rPr lang="en-US" b="0" i="1" smtClean="0">
-                        <a:latin typeface="Cambria Math" panose="02040503050406030204" pitchFamily="18" charset="0"/>
-                      </a:rPr>
-                      <m:t>−1</m:t>
-                    </m:r>
-                  </m:oMath>
-                </a14:m>
-                <a:r>
-                  <a:rPr lang="en-US" dirty="0"/>
-                  <a:t> iterations</a:t>
-                </a:r>
-              </a:p>
-              <a:p>
-                <a:pPr lvl="1"/>
-                <a:r>
-                  <a:rPr lang="en-US" dirty="0"/>
-                  <a:t>Why? </a:t>
-                </a:r>
-              </a:p>
-              <a:p>
-                <a:pPr lvl="1"/>
-                <a:endParaRPr lang="en-US" dirty="0"/>
-              </a:p>
-              <a:p>
-                <a:r>
-                  <a:rPr lang="en-US" dirty="0"/>
-                  <a:t>But if a graph has negative cycle(s), then some estimated distances </a:t>
-                </a:r>
-                <a:r>
-                  <a:rPr lang="en-US" dirty="0">
-                    <a:solidFill>
-                      <a:srgbClr val="C00000"/>
-                    </a:solidFill>
-                  </a:rPr>
-                  <a:t>continue to decrease </a:t>
-                </a:r>
-                <a:r>
-                  <a:rPr lang="en-US" dirty="0"/>
-                  <a:t>even after </a:t>
-                </a:r>
-                <a14:m>
-                  <m:oMath xmlns:m="http://schemas.openxmlformats.org/officeDocument/2006/math">
-                    <m:r>
-                      <a:rPr lang="en-US" b="0" i="1" smtClean="0">
-                        <a:latin typeface="Cambria Math" panose="02040503050406030204" pitchFamily="18" charset="0"/>
-                      </a:rPr>
-                      <m:t>𝑉</m:t>
-                    </m:r>
-                  </m:oMath>
-                </a14:m>
-                <a:r>
-                  <a:rPr lang="en-US" dirty="0"/>
-                  <a:t> iterations</a:t>
-                </a:r>
-              </a:p>
-              <a:p>
-                <a:pPr lvl="1"/>
-                <a:endParaRPr lang="en-US" dirty="0"/>
-              </a:p>
-              <a:p>
-                <a:pPr lvl="1"/>
-                <a:endParaRPr lang="en-US" dirty="0"/>
-              </a:p>
-              <a:p>
-                <a:endParaRPr lang="en-US" dirty="0"/>
-              </a:p>
-            </p:txBody>
-          </p:sp>
-        </mc:Choice>
-        <mc:Fallback xmlns="">
-          <p:sp>
-            <p:nvSpPr>
-              <p:cNvPr id="3" name="Content Placeholder 2">
-                <a:extLst>
-                  <a:ext uri="{FF2B5EF4-FFF2-40B4-BE49-F238E27FC236}">
-                    <a16:creationId xmlns:a16="http://schemas.microsoft.com/office/drawing/2014/main" id="{354B81FA-4F37-487A-A741-271225E843B8}"/>
-                  </a:ext>
-                </a:extLst>
-              </p:cNvPr>
-              <p:cNvSpPr>
-                <a:spLocks noGrp="1" noRot="1" noChangeAspect="1" noMove="1" noResize="1" noEditPoints="1" noAdjustHandles="1" noChangeArrowheads="1" noChangeShapeType="1" noTextEdit="1"/>
-              </p:cNvSpPr>
-              <p:nvPr>
-                <p:ph sz="quarter" idx="1"/>
-              </p:nvPr>
-            </p:nvSpPr>
-            <p:spPr>
-              <a:blipFill>
-                <a:blip r:embed="rId2"/>
-                <a:stretch>
-                  <a:fillRect l="-667" t="-1111"/>
-                </a:stretch>
-              </a:blipFill>
-            </p:spPr>
-            <p:txBody>
-              <a:bodyPr/>
-              <a:lstStyle/>
-              <a:p>
-                <a:r>
-                  <a:rPr lang="en-US">
-                    <a:noFill/>
-                  </a:rPr>
-                  <a:t> </a:t>
-                </a:r>
-              </a:p>
-            </p:txBody>
-          </p:sp>
-        </mc:Fallback>
-      </mc:AlternateContent>
-      <p:pic>
-        <p:nvPicPr>
-          <p:cNvPr id="5" name="Picture 4">
-            <a:extLst>
-              <a:ext uri="{FF2B5EF4-FFF2-40B4-BE49-F238E27FC236}">
-                <a16:creationId xmlns:a16="http://schemas.microsoft.com/office/drawing/2014/main" id="{2A99771C-1FE2-4026-9513-C17410C53090}"/>
-              </a:ext>
-            </a:extLst>
-          </p:cNvPr>
-          <p:cNvPicPr>
-            <a:picLocks noChangeAspect="1"/>
-          </p:cNvPicPr>
-          <p:nvPr/>
-        </p:nvPicPr>
-        <p:blipFill>
-          <a:blip r:embed="rId3"/>
-          <a:stretch>
-            <a:fillRect/>
-          </a:stretch>
-        </p:blipFill>
-        <p:spPr>
-          <a:xfrm>
-            <a:off x="8153400" y="5037083"/>
-            <a:ext cx="2653678" cy="1828800"/>
-          </a:xfrm>
-          <a:prstGeom prst="rect">
-            <a:avLst/>
-          </a:prstGeom>
-        </p:spPr>
-      </p:pic>
-    </p:spTree>
-    <p:extLst>
-      <p:ext uri="{BB962C8B-B14F-4D97-AF65-F5344CB8AC3E}">
-        <p14:creationId xmlns:p14="http://schemas.microsoft.com/office/powerpoint/2010/main" val="3463495885"/>
-      </p:ext>
-    </p:extLst>
-  </p:cSld>
-  <p:clrMapOvr>
-    <a:masterClrMapping/>
-  </p:clrMapOvr>
-</p:sld>
-</file>
-
-<file path=ppt/slides/slide49.xml><?xml version="1.0" encoding="utf-8"?>
-<p:sld xmlns:a="http://schemas.openxmlformats.org/drawingml/2006/main" xmlns:r="http://schemas.openxmlformats.org/officeDocument/2006/relationships" xmlns:p="http://schemas.openxmlformats.org/presentationml/2006/main">
-  <p:cSld>
-    <p:spTree>
-      <p:nvGrpSpPr>
-        <p:cNvPr id="1" name=""/>
-        <p:cNvGrpSpPr/>
-        <p:nvPr/>
-      </p:nvGrpSpPr>
-      <p:grpSpPr>
-        <a:xfrm>
-          <a:off x="0" y="0"/>
-          <a:ext cx="0" cy="0"/>
-          <a:chOff x="0" y="0"/>
-          <a:chExt cx="0" cy="0"/>
-        </a:xfrm>
-      </p:grpSpPr>
-      <p:sp>
-        <p:nvSpPr>
-          <p:cNvPr id="2" name="Title 1">
-            <a:extLst>
-              <a:ext uri="{FF2B5EF4-FFF2-40B4-BE49-F238E27FC236}">
-                <a16:creationId xmlns:a16="http://schemas.microsoft.com/office/drawing/2014/main" id="{C73D0361-5842-4BCC-98B3-49F7413F7E03}"/>
-              </a:ext>
-            </a:extLst>
-          </p:cNvPr>
-          <p:cNvSpPr>
-            <a:spLocks noGrp="1"/>
-          </p:cNvSpPr>
-          <p:nvPr>
-            <p:ph type="title"/>
-          </p:nvPr>
-        </p:nvSpPr>
-        <p:spPr/>
-        <p:txBody>
-          <a:bodyPr/>
-          <a:lstStyle/>
-          <a:p>
-            <a:r>
-              <a:rPr lang="en-US" dirty="0"/>
-              <a:t>Negative Cycles </a:t>
-            </a:r>
-          </a:p>
-        </p:txBody>
-      </p:sp>
-      <mc:AlternateContent xmlns:mc="http://schemas.openxmlformats.org/markup-compatibility/2006" xmlns:a14="http://schemas.microsoft.com/office/drawing/2010/main">
-        <mc:Choice Requires="a14">
-          <p:sp>
-            <p:nvSpPr>
-              <p:cNvPr id="3" name="Content Placeholder 2">
-                <a:extLst>
-                  <a:ext uri="{FF2B5EF4-FFF2-40B4-BE49-F238E27FC236}">
-                    <a16:creationId xmlns:a16="http://schemas.microsoft.com/office/drawing/2014/main" id="{354B81FA-4F37-487A-A741-271225E843B8}"/>
-                  </a:ext>
-                </a:extLst>
-              </p:cNvPr>
-              <p:cNvSpPr>
-                <a:spLocks noGrp="1"/>
-              </p:cNvSpPr>
-              <p:nvPr>
-                <p:ph sz="quarter" idx="1"/>
-              </p:nvPr>
-            </p:nvSpPr>
-            <p:spPr/>
-            <p:txBody>
-              <a:bodyPr/>
-              <a:lstStyle/>
-              <a:p>
-                <a:r>
-                  <a:rPr lang="en-US" dirty="0"/>
-                  <a:t>If a graph does not have any negative cycle, then the estimated distances </a:t>
-                </a:r>
-                <a:r>
-                  <a:rPr lang="en-US" dirty="0">
-                    <a:solidFill>
-                      <a:srgbClr val="00B050"/>
-                    </a:solidFill>
-                  </a:rPr>
-                  <a:t>stop changing </a:t>
-                </a:r>
-                <a:r>
-                  <a:rPr lang="en-US" dirty="0"/>
-                  <a:t>after </a:t>
-                </a:r>
-                <a14:m>
-                  <m:oMath xmlns:m="http://schemas.openxmlformats.org/officeDocument/2006/math">
-                    <m:r>
-                      <a:rPr lang="en-US" b="0" i="1" smtClean="0">
-                        <a:latin typeface="Cambria Math" panose="02040503050406030204" pitchFamily="18" charset="0"/>
-                      </a:rPr>
-                      <m:t>𝑉</m:t>
-                    </m:r>
-                    <m:r>
-                      <a:rPr lang="en-US" b="0" i="1" smtClean="0">
-                        <a:latin typeface="Cambria Math" panose="02040503050406030204" pitchFamily="18" charset="0"/>
-                      </a:rPr>
-                      <m:t>−1</m:t>
-                    </m:r>
-                  </m:oMath>
-                </a14:m>
-                <a:r>
-                  <a:rPr lang="en-US" dirty="0"/>
-                  <a:t> iterations</a:t>
-                </a:r>
-              </a:p>
-              <a:p>
-                <a:r>
-                  <a:rPr lang="en-US" dirty="0"/>
-                  <a:t>But if a graph has negative cycle(s), then some estimated distances </a:t>
-                </a:r>
-                <a:r>
-                  <a:rPr lang="en-US" dirty="0">
-                    <a:solidFill>
-                      <a:srgbClr val="C00000"/>
-                    </a:solidFill>
-                  </a:rPr>
-                  <a:t>continue to decrease </a:t>
-                </a:r>
-                <a:r>
-                  <a:rPr lang="en-US" dirty="0"/>
-                  <a:t>even after </a:t>
-                </a:r>
-                <a14:m>
-                  <m:oMath xmlns:m="http://schemas.openxmlformats.org/officeDocument/2006/math">
-                    <m:r>
-                      <a:rPr lang="en-US" b="0" i="1" smtClean="0">
-                        <a:latin typeface="Cambria Math" panose="02040503050406030204" pitchFamily="18" charset="0"/>
-                      </a:rPr>
-                      <m:t>𝑉</m:t>
-                    </m:r>
-                  </m:oMath>
-                </a14:m>
-                <a:r>
-                  <a:rPr lang="en-US" dirty="0"/>
-                  <a:t> iterations</a:t>
-                </a:r>
-              </a:p>
-              <a:p>
-                <a:endParaRPr lang="en-US" dirty="0"/>
-              </a:p>
-              <a:p>
-                <a:r>
-                  <a:rPr lang="en-US" dirty="0"/>
-                  <a:t>Hence Bellman-Ford can be modified to also detect negative cycles</a:t>
-                </a:r>
-              </a:p>
-              <a:p>
-                <a:pPr lvl="1"/>
-                <a:r>
-                  <a:rPr lang="en-US" dirty="0"/>
-                  <a:t>Run a </a:t>
-                </a:r>
-                <a14:m>
-                  <m:oMath xmlns:m="http://schemas.openxmlformats.org/officeDocument/2006/math">
-                    <m:r>
-                      <a:rPr lang="en-US" b="0" i="1" smtClean="0">
-                        <a:latin typeface="Cambria Math" panose="02040503050406030204" pitchFamily="18" charset="0"/>
-                      </a:rPr>
-                      <m:t>𝑉</m:t>
-                    </m:r>
-                  </m:oMath>
-                </a14:m>
-                <a:r>
-                  <a:rPr lang="en-US" dirty="0"/>
-                  <a:t> iteration of “update all edges”</a:t>
-                </a:r>
-              </a:p>
-              <a:p>
-                <a:pPr lvl="1"/>
-                <a:r>
-                  <a:rPr lang="en-US" dirty="0"/>
-                  <a:t>If any estimated distance is still decreasing, a negative cycle exists</a:t>
-                </a:r>
-              </a:p>
-            </p:txBody>
-          </p:sp>
-        </mc:Choice>
-        <mc:Fallback xmlns="">
-          <p:sp>
-            <p:nvSpPr>
-              <p:cNvPr id="3" name="Content Placeholder 2">
-                <a:extLst>
-                  <a:ext uri="{FF2B5EF4-FFF2-40B4-BE49-F238E27FC236}">
-                    <a16:creationId xmlns:a16="http://schemas.microsoft.com/office/drawing/2014/main" id="{354B81FA-4F37-487A-A741-271225E843B8}"/>
-                  </a:ext>
-                </a:extLst>
-              </p:cNvPr>
-              <p:cNvSpPr>
-                <a:spLocks noGrp="1" noRot="1" noChangeAspect="1" noMove="1" noResize="1" noEditPoints="1" noAdjustHandles="1" noChangeArrowheads="1" noChangeShapeType="1" noTextEdit="1"/>
-              </p:cNvSpPr>
-              <p:nvPr>
-                <p:ph sz="quarter" idx="1"/>
-              </p:nvPr>
-            </p:nvSpPr>
-            <p:spPr>
-              <a:blipFill>
-                <a:blip r:embed="rId2"/>
-                <a:stretch>
-                  <a:fillRect l="-667" t="-1111"/>
-                </a:stretch>
-              </a:blipFill>
-            </p:spPr>
-            <p:txBody>
-              <a:bodyPr/>
-              <a:lstStyle/>
-              <a:p>
-                <a:r>
-                  <a:rPr lang="en-US">
-                    <a:noFill/>
-                  </a:rPr>
-                  <a:t> </a:t>
-                </a:r>
-              </a:p>
-            </p:txBody>
-          </p:sp>
-        </mc:Fallback>
-      </mc:AlternateContent>
-    </p:spTree>
-    <p:extLst>
-      <p:ext uri="{BB962C8B-B14F-4D97-AF65-F5344CB8AC3E}">
-        <p14:creationId xmlns:p14="http://schemas.microsoft.com/office/powerpoint/2010/main" val="2198389744"/>
       </p:ext>
     </p:extLst>
   </p:cSld>
@@ -36768,6 +36668,490 @@
           <p:cNvPr id="2" name="Title 1">
             <a:extLst>
               <a:ext uri="{FF2B5EF4-FFF2-40B4-BE49-F238E27FC236}">
+                <a16:creationId xmlns:a16="http://schemas.microsoft.com/office/drawing/2014/main" id="{C73D0361-5842-4BCC-98B3-49F7413F7E03}"/>
+              </a:ext>
+            </a:extLst>
+          </p:cNvPr>
+          <p:cNvSpPr>
+            <a:spLocks noGrp="1"/>
+          </p:cNvSpPr>
+          <p:nvPr>
+            <p:ph type="title"/>
+          </p:nvPr>
+        </p:nvSpPr>
+        <p:spPr/>
+        <p:txBody>
+          <a:bodyPr/>
+          <a:lstStyle/>
+          <a:p>
+            <a:r>
+              <a:rPr lang="en-US" dirty="0"/>
+              <a:t>Negative Cycles </a:t>
+            </a:r>
+          </a:p>
+        </p:txBody>
+      </p:sp>
+      <mc:AlternateContent xmlns:mc="http://schemas.openxmlformats.org/markup-compatibility/2006" xmlns:a14="http://schemas.microsoft.com/office/drawing/2010/main">
+        <mc:Choice Requires="a14">
+          <p:sp>
+            <p:nvSpPr>
+              <p:cNvPr id="3" name="Content Placeholder 2">
+                <a:extLst>
+                  <a:ext uri="{FF2B5EF4-FFF2-40B4-BE49-F238E27FC236}">
+                    <a16:creationId xmlns:a16="http://schemas.microsoft.com/office/drawing/2014/main" id="{354B81FA-4F37-487A-A741-271225E843B8}"/>
+                  </a:ext>
+                </a:extLst>
+              </p:cNvPr>
+              <p:cNvSpPr>
+                <a:spLocks noGrp="1"/>
+              </p:cNvSpPr>
+              <p:nvPr>
+                <p:ph sz="quarter" idx="1"/>
+              </p:nvPr>
+            </p:nvSpPr>
+            <p:spPr/>
+            <p:txBody>
+              <a:bodyPr/>
+              <a:lstStyle/>
+              <a:p>
+                <a:r>
+                  <a:rPr lang="en-US" dirty="0"/>
+                  <a:t>Recall: if a graph has negative cycle(s), then the shortest paths are not well-defined</a:t>
+                </a:r>
+              </a:p>
+              <a:p>
+                <a:endParaRPr lang="en-US" dirty="0"/>
+              </a:p>
+              <a:p>
+                <a:r>
+                  <a:rPr lang="en-US" dirty="0"/>
+                  <a:t>If a graph does not have any negative cycle, then the estimated distances </a:t>
+                </a:r>
+                <a:r>
+                  <a:rPr lang="en-US" dirty="0">
+                    <a:solidFill>
+                      <a:srgbClr val="00B050"/>
+                    </a:solidFill>
+                  </a:rPr>
+                  <a:t>stop changing </a:t>
+                </a:r>
+                <a:r>
+                  <a:rPr lang="en-US" dirty="0"/>
+                  <a:t>after </a:t>
+                </a:r>
+                <a14:m>
+                  <m:oMath xmlns:m="http://schemas.openxmlformats.org/officeDocument/2006/math">
+                    <m:r>
+                      <a:rPr lang="en-US" b="0" i="1" smtClean="0">
+                        <a:latin typeface="Cambria Math" panose="02040503050406030204" pitchFamily="18" charset="0"/>
+                      </a:rPr>
+                      <m:t>𝑉</m:t>
+                    </m:r>
+                    <m:r>
+                      <a:rPr lang="en-US" b="0" i="1" smtClean="0">
+                        <a:latin typeface="Cambria Math" panose="02040503050406030204" pitchFamily="18" charset="0"/>
+                      </a:rPr>
+                      <m:t>−1</m:t>
+                    </m:r>
+                  </m:oMath>
+                </a14:m>
+                <a:r>
+                  <a:rPr lang="en-US" dirty="0"/>
+                  <a:t> iterations</a:t>
+                </a:r>
+              </a:p>
+              <a:p>
+                <a:pPr lvl="1"/>
+                <a:r>
+                  <a:rPr lang="en-US" dirty="0"/>
+                  <a:t>Why? </a:t>
+                </a:r>
+              </a:p>
+              <a:p>
+                <a:pPr lvl="1"/>
+                <a:endParaRPr lang="en-US" dirty="0"/>
+              </a:p>
+              <a:p>
+                <a:r>
+                  <a:rPr lang="en-US" dirty="0"/>
+                  <a:t>But if a graph has negative cycle(s), then some estimated distances </a:t>
+                </a:r>
+                <a:r>
+                  <a:rPr lang="en-US" dirty="0">
+                    <a:solidFill>
+                      <a:srgbClr val="C00000"/>
+                    </a:solidFill>
+                  </a:rPr>
+                  <a:t>continue to decrease </a:t>
+                </a:r>
+                <a:r>
+                  <a:rPr lang="en-US" dirty="0"/>
+                  <a:t>even after </a:t>
+                </a:r>
+                <a14:m>
+                  <m:oMath xmlns:m="http://schemas.openxmlformats.org/officeDocument/2006/math">
+                    <m:r>
+                      <a:rPr lang="en-US" b="0" i="1" smtClean="0">
+                        <a:latin typeface="Cambria Math" panose="02040503050406030204" pitchFamily="18" charset="0"/>
+                      </a:rPr>
+                      <m:t>𝑉</m:t>
+                    </m:r>
+                  </m:oMath>
+                </a14:m>
+                <a:r>
+                  <a:rPr lang="en-US" dirty="0"/>
+                  <a:t> iterations</a:t>
+                </a:r>
+              </a:p>
+              <a:p>
+                <a:pPr lvl="1"/>
+                <a:endParaRPr lang="en-US" dirty="0"/>
+              </a:p>
+              <a:p>
+                <a:pPr lvl="1"/>
+                <a:endParaRPr lang="en-US" dirty="0"/>
+              </a:p>
+              <a:p>
+                <a:endParaRPr lang="en-US" dirty="0"/>
+              </a:p>
+            </p:txBody>
+          </p:sp>
+        </mc:Choice>
+        <mc:Fallback xmlns="">
+          <p:sp>
+            <p:nvSpPr>
+              <p:cNvPr id="3" name="Content Placeholder 2">
+                <a:extLst>
+                  <a:ext uri="{FF2B5EF4-FFF2-40B4-BE49-F238E27FC236}">
+                    <a16:creationId xmlns:a16="http://schemas.microsoft.com/office/drawing/2014/main" id="{354B81FA-4F37-487A-A741-271225E843B8}"/>
+                  </a:ext>
+                </a:extLst>
+              </p:cNvPr>
+              <p:cNvSpPr>
+                <a:spLocks noGrp="1" noRot="1" noChangeAspect="1" noMove="1" noResize="1" noEditPoints="1" noAdjustHandles="1" noChangeArrowheads="1" noChangeShapeType="1" noTextEdit="1"/>
+              </p:cNvSpPr>
+              <p:nvPr>
+                <p:ph sz="quarter" idx="1"/>
+              </p:nvPr>
+            </p:nvSpPr>
+            <p:spPr>
+              <a:blipFill>
+                <a:blip r:embed="rId2"/>
+                <a:stretch>
+                  <a:fillRect l="-667" t="-1111"/>
+                </a:stretch>
+              </a:blipFill>
+            </p:spPr>
+            <p:txBody>
+              <a:bodyPr/>
+              <a:lstStyle/>
+              <a:p>
+                <a:r>
+                  <a:rPr lang="en-US">
+                    <a:noFill/>
+                  </a:rPr>
+                  <a:t> </a:t>
+                </a:r>
+              </a:p>
+            </p:txBody>
+          </p:sp>
+        </mc:Fallback>
+      </mc:AlternateContent>
+      <p:pic>
+        <p:nvPicPr>
+          <p:cNvPr id="5" name="Picture 4">
+            <a:extLst>
+              <a:ext uri="{FF2B5EF4-FFF2-40B4-BE49-F238E27FC236}">
+                <a16:creationId xmlns:a16="http://schemas.microsoft.com/office/drawing/2014/main" id="{2A99771C-1FE2-4026-9513-C17410C53090}"/>
+              </a:ext>
+            </a:extLst>
+          </p:cNvPr>
+          <p:cNvPicPr>
+            <a:picLocks noChangeAspect="1"/>
+          </p:cNvPicPr>
+          <p:nvPr/>
+        </p:nvPicPr>
+        <p:blipFill>
+          <a:blip r:embed="rId3"/>
+          <a:stretch>
+            <a:fillRect/>
+          </a:stretch>
+        </p:blipFill>
+        <p:spPr>
+          <a:xfrm>
+            <a:off x="8153400" y="5037083"/>
+            <a:ext cx="2653678" cy="1828800"/>
+          </a:xfrm>
+          <a:prstGeom prst="rect">
+            <a:avLst/>
+          </a:prstGeom>
+        </p:spPr>
+      </p:pic>
+    </p:spTree>
+    <p:extLst>
+      <p:ext uri="{BB962C8B-B14F-4D97-AF65-F5344CB8AC3E}">
+        <p14:creationId xmlns:p14="http://schemas.microsoft.com/office/powerpoint/2010/main" val="3463495885"/>
+      </p:ext>
+    </p:extLst>
+  </p:cSld>
+  <p:clrMapOvr>
+    <a:masterClrMapping/>
+  </p:clrMapOvr>
+</p:sld>
+</file>
+
+<file path=ppt/slides/slide51.xml><?xml version="1.0" encoding="utf-8"?>
+<p:sld xmlns:a="http://schemas.openxmlformats.org/drawingml/2006/main" xmlns:r="http://schemas.openxmlformats.org/officeDocument/2006/relationships" xmlns:p="http://schemas.openxmlformats.org/presentationml/2006/main">
+  <p:cSld>
+    <p:spTree>
+      <p:nvGrpSpPr>
+        <p:cNvPr id="1" name=""/>
+        <p:cNvGrpSpPr/>
+        <p:nvPr/>
+      </p:nvGrpSpPr>
+      <p:grpSpPr>
+        <a:xfrm>
+          <a:off x="0" y="0"/>
+          <a:ext cx="0" cy="0"/>
+          <a:chOff x="0" y="0"/>
+          <a:chExt cx="0" cy="0"/>
+        </a:xfrm>
+      </p:grpSpPr>
+      <p:sp>
+        <p:nvSpPr>
+          <p:cNvPr id="2" name="Title 1">
+            <a:extLst>
+              <a:ext uri="{FF2B5EF4-FFF2-40B4-BE49-F238E27FC236}">
+                <a16:creationId xmlns:a16="http://schemas.microsoft.com/office/drawing/2014/main" id="{C73D0361-5842-4BCC-98B3-49F7413F7E03}"/>
+              </a:ext>
+            </a:extLst>
+          </p:cNvPr>
+          <p:cNvSpPr>
+            <a:spLocks noGrp="1"/>
+          </p:cNvSpPr>
+          <p:nvPr>
+            <p:ph type="title"/>
+          </p:nvPr>
+        </p:nvSpPr>
+        <p:spPr/>
+        <p:txBody>
+          <a:bodyPr/>
+          <a:lstStyle/>
+          <a:p>
+            <a:r>
+              <a:rPr lang="en-US" dirty="0"/>
+              <a:t>Negative Cycles </a:t>
+            </a:r>
+          </a:p>
+        </p:txBody>
+      </p:sp>
+      <mc:AlternateContent xmlns:mc="http://schemas.openxmlformats.org/markup-compatibility/2006" xmlns:a14="http://schemas.microsoft.com/office/drawing/2010/main">
+        <mc:Choice Requires="a14">
+          <p:sp>
+            <p:nvSpPr>
+              <p:cNvPr id="3" name="Content Placeholder 2">
+                <a:extLst>
+                  <a:ext uri="{FF2B5EF4-FFF2-40B4-BE49-F238E27FC236}">
+                    <a16:creationId xmlns:a16="http://schemas.microsoft.com/office/drawing/2014/main" id="{354B81FA-4F37-487A-A741-271225E843B8}"/>
+                  </a:ext>
+                </a:extLst>
+              </p:cNvPr>
+              <p:cNvSpPr>
+                <a:spLocks noGrp="1"/>
+              </p:cNvSpPr>
+              <p:nvPr>
+                <p:ph sz="quarter" idx="1"/>
+              </p:nvPr>
+            </p:nvSpPr>
+            <p:spPr/>
+            <p:txBody>
+              <a:bodyPr/>
+              <a:lstStyle/>
+              <a:p>
+                <a:r>
+                  <a:rPr lang="en-US" dirty="0"/>
+                  <a:t>If a graph does not have any negative cycle, then the estimated distances </a:t>
+                </a:r>
+                <a:r>
+                  <a:rPr lang="en-US" dirty="0">
+                    <a:solidFill>
+                      <a:srgbClr val="00B050"/>
+                    </a:solidFill>
+                  </a:rPr>
+                  <a:t>stop changing </a:t>
+                </a:r>
+                <a:r>
+                  <a:rPr lang="en-US" dirty="0"/>
+                  <a:t>after </a:t>
+                </a:r>
+                <a14:m>
+                  <m:oMath xmlns:m="http://schemas.openxmlformats.org/officeDocument/2006/math">
+                    <m:r>
+                      <a:rPr lang="en-US" b="0" i="1" smtClean="0">
+                        <a:latin typeface="Cambria Math" panose="02040503050406030204" pitchFamily="18" charset="0"/>
+                      </a:rPr>
+                      <m:t>𝑉</m:t>
+                    </m:r>
+                    <m:r>
+                      <a:rPr lang="en-US" b="0" i="1" smtClean="0">
+                        <a:latin typeface="Cambria Math" panose="02040503050406030204" pitchFamily="18" charset="0"/>
+                      </a:rPr>
+                      <m:t>−1</m:t>
+                    </m:r>
+                  </m:oMath>
+                </a14:m>
+                <a:r>
+                  <a:rPr lang="en-US" dirty="0"/>
+                  <a:t> iterations</a:t>
+                </a:r>
+              </a:p>
+              <a:p>
+                <a:r>
+                  <a:rPr lang="en-US" dirty="0"/>
+                  <a:t>But if a graph has negative cycle(s), then some estimated distances </a:t>
+                </a:r>
+                <a:r>
+                  <a:rPr lang="en-US" dirty="0">
+                    <a:solidFill>
+                      <a:srgbClr val="C00000"/>
+                    </a:solidFill>
+                  </a:rPr>
+                  <a:t>continue to decrease </a:t>
+                </a:r>
+                <a:r>
+                  <a:rPr lang="en-US" dirty="0"/>
+                  <a:t>even after </a:t>
+                </a:r>
+                <a14:m>
+                  <m:oMath xmlns:m="http://schemas.openxmlformats.org/officeDocument/2006/math">
+                    <m:r>
+                      <a:rPr lang="en-US" b="0" i="1" smtClean="0">
+                        <a:latin typeface="Cambria Math" panose="02040503050406030204" pitchFamily="18" charset="0"/>
+                      </a:rPr>
+                      <m:t>𝑉</m:t>
+                    </m:r>
+                  </m:oMath>
+                </a14:m>
+                <a:r>
+                  <a:rPr lang="en-US" dirty="0"/>
+                  <a:t> iterations</a:t>
+                </a:r>
+              </a:p>
+              <a:p>
+                <a:endParaRPr lang="en-US" dirty="0"/>
+              </a:p>
+              <a:p>
+                <a:r>
+                  <a:rPr lang="en-US" dirty="0"/>
+                  <a:t>Hence Bellman-Ford can be modified to also detect negative cycles</a:t>
+                </a:r>
+              </a:p>
+              <a:p>
+                <a:pPr lvl="1"/>
+                <a:r>
+                  <a:rPr lang="en-US" dirty="0"/>
+                  <a:t>Run a </a:t>
+                </a:r>
+                <a14:m>
+                  <m:oMath xmlns:m="http://schemas.openxmlformats.org/officeDocument/2006/math">
+                    <m:r>
+                      <a:rPr lang="en-US" b="0" i="1" smtClean="0">
+                        <a:latin typeface="Cambria Math" panose="02040503050406030204" pitchFamily="18" charset="0"/>
+                      </a:rPr>
+                      <m:t>𝑉</m:t>
+                    </m:r>
+                  </m:oMath>
+                </a14:m>
+                <a:r>
+                  <a:rPr lang="en-US" dirty="0"/>
+                  <a:t> iteration of “update all edges”</a:t>
+                </a:r>
+              </a:p>
+              <a:p>
+                <a:pPr lvl="1"/>
+                <a:r>
+                  <a:rPr lang="en-US" dirty="0"/>
+                  <a:t>If any estimated distance is still decreasing, a negative cycle exists</a:t>
+                </a:r>
+              </a:p>
+            </p:txBody>
+          </p:sp>
+        </mc:Choice>
+        <mc:Fallback xmlns="">
+          <p:sp>
+            <p:nvSpPr>
+              <p:cNvPr id="3" name="Content Placeholder 2">
+                <a:extLst>
+                  <a:ext uri="{FF2B5EF4-FFF2-40B4-BE49-F238E27FC236}">
+                    <a16:creationId xmlns:a16="http://schemas.microsoft.com/office/drawing/2014/main" id="{354B81FA-4F37-487A-A741-271225E843B8}"/>
+                  </a:ext>
+                </a:extLst>
+              </p:cNvPr>
+              <p:cNvSpPr>
+                <a:spLocks noGrp="1" noRot="1" noChangeAspect="1" noMove="1" noResize="1" noEditPoints="1" noAdjustHandles="1" noChangeArrowheads="1" noChangeShapeType="1" noTextEdit="1"/>
+              </p:cNvSpPr>
+              <p:nvPr>
+                <p:ph sz="quarter" idx="1"/>
+              </p:nvPr>
+            </p:nvSpPr>
+            <p:spPr>
+              <a:blipFill>
+                <a:blip r:embed="rId2"/>
+                <a:stretch>
+                  <a:fillRect l="-667" t="-1111"/>
+                </a:stretch>
+              </a:blipFill>
+            </p:spPr>
+            <p:txBody>
+              <a:bodyPr/>
+              <a:lstStyle/>
+              <a:p>
+                <a:r>
+                  <a:rPr lang="en-US">
+                    <a:noFill/>
+                  </a:rPr>
+                  <a:t> </a:t>
+                </a:r>
+              </a:p>
+            </p:txBody>
+          </p:sp>
+        </mc:Fallback>
+      </mc:AlternateContent>
+    </p:spTree>
+    <p:extLst>
+      <p:ext uri="{BB962C8B-B14F-4D97-AF65-F5344CB8AC3E}">
+        <p14:creationId xmlns:p14="http://schemas.microsoft.com/office/powerpoint/2010/main" val="2198389744"/>
+      </p:ext>
+    </p:extLst>
+  </p:cSld>
+  <p:clrMapOvr>
+    <a:masterClrMapping/>
+  </p:clrMapOvr>
+</p:sld>
+</file>
+
+<file path=ppt/slides/slide52.xml><?xml version="1.0" encoding="utf-8"?>
+<p:sld xmlns:a="http://schemas.openxmlformats.org/drawingml/2006/main" xmlns:r="http://schemas.openxmlformats.org/officeDocument/2006/relationships" xmlns:p="http://schemas.openxmlformats.org/presentationml/2006/main">
+  <p:cSld>
+    <p:spTree>
+      <p:nvGrpSpPr>
+        <p:cNvPr id="1" name=""/>
+        <p:cNvGrpSpPr/>
+        <p:nvPr/>
+      </p:nvGrpSpPr>
+      <p:grpSpPr>
+        <a:xfrm>
+          <a:off x="0" y="0"/>
+          <a:ext cx="0" cy="0"/>
+          <a:chOff x="0" y="0"/>
+          <a:chExt cx="0" cy="0"/>
+        </a:xfrm>
+      </p:grpSpPr>
+      <p:sp>
+        <p:nvSpPr>
+          <p:cNvPr id="2" name="Title 1">
+            <a:extLst>
+              <a:ext uri="{FF2B5EF4-FFF2-40B4-BE49-F238E27FC236}">
                 <a16:creationId xmlns:a16="http://schemas.microsoft.com/office/drawing/2014/main" id="{5F305D00-9D6B-4A22-A0DF-28EF8ADF470C}"/>
               </a:ext>
             </a:extLst>
@@ -36865,7 +37249,7 @@
 </p:sld>
 </file>
 
-<file path=ppt/slides/slide51.xml><?xml version="1.0" encoding="utf-8"?>
+<file path=ppt/slides/slide53.xml><?xml version="1.0" encoding="utf-8"?>
 <p:sld xmlns:a="http://schemas.openxmlformats.org/drawingml/2006/main" xmlns:r="http://schemas.openxmlformats.org/officeDocument/2006/relationships" xmlns:p="http://schemas.openxmlformats.org/presentationml/2006/main">
   <p:cSld>
     <p:spTree>
